--- a/3-Master_Plan/re_entry/HEROs_and_PASSes/slides/auto/CHAR_PD21_rho_hsort_timeseries_ppm0lt20_AUTO.pptx
+++ b/3-Master_Plan/re_entry/HEROs_and_PASSes/slides/auto/CHAR_PD21_rho_hsort_timeseries_ppm0lt20_AUTO.pptx
@@ -5,9 +5,9 @@
     <p:sldMasterId id="2147483648" r:id="rId1"/>
   </p:sldMasterIdLst>
   <p:sldIdLst>
-    <p:sldId id="262" r:id="rId2"/>
+    <p:sldId id="256" r:id="rId7"/>
   </p:sldIdLst>
-  <p:sldSz cx="12192000" cy="6858000"/>
+  <p:sldSz cx="12191695" cy="6858000" type="screen4x3"/>
   <p:notesSz cx="6858000" cy="9144000"/>
   <p:defaultTextStyle>
     <a:defPPr>
@@ -104,22 +104,6 @@
       </a:defRPr>
     </a:lvl9pPr>
   </p:defaultTextStyle>
-  <p:extLst>
-    <p:ext uri="{EFAFB233-063F-42B5-8137-9DF3F51BA10A}">
-      <p15:sldGuideLst xmlns:p15="http://schemas.microsoft.com/office/powerpoint/2012/main">
-        <p15:guide id="1" orient="horz" pos="2160">
-          <p15:clr>
-            <a:srgbClr val="A4A3A4"/>
-          </p15:clr>
-        </p15:guide>
-        <p15:guide id="2" pos="2880">
-          <p15:clr>
-            <a:srgbClr val="A4A3A4"/>
-          </p15:clr>
-        </p15:guide>
-      </p15:sldGuideLst>
-    </p:ext>
-  </p:extLst>
 </p:presentation>
 </file>
 
@@ -161,9 +145,10 @@
           <a:lstStyle/>
           <a:p>
             <a:r>
-              <a:rPr lang="en-US"/>
+              <a:rPr lang="en-US" smtClean="0"/>
               <a:t>Click to edit Master title style</a:t>
             </a:r>
+            <a:endParaRPr lang="en-US"/>
           </a:p>
         </p:txBody>
       </p:sp>
@@ -279,9 +264,10 @@
           </a:lstStyle>
           <a:p>
             <a:r>
-              <a:rPr lang="en-US"/>
+              <a:rPr lang="en-US" smtClean="0"/>
               <a:t>Click to edit Master subtitle style</a:t>
             </a:r>
+            <a:endParaRPr lang="en-US"/>
           </a:p>
         </p:txBody>
       </p:sp>
@@ -302,7 +288,7 @@
           <a:p>
             <a:fld id="{5BCAD085-E8A6-8845-BD4E-CB4CCA059FC4}" type="datetimeFigureOut">
               <a:rPr lang="en-US" smtClean="0"/>
-              <a:t>8/17/26</a:t>
+              <a:t>1/27/13</a:t>
             </a:fld>
             <a:endParaRPr lang="en-US"/>
           </a:p>
@@ -396,9 +382,10 @@
           <a:lstStyle/>
           <a:p>
             <a:r>
-              <a:rPr lang="en-US"/>
+              <a:rPr lang="en-US" smtClean="0"/>
               <a:t>Click to edit Master title style</a:t>
             </a:r>
+            <a:endParaRPr lang="en-US"/>
           </a:p>
         </p:txBody>
       </p:sp>
@@ -419,37 +406,38 @@
           <a:p>
             <a:pPr lvl="0"/>
             <a:r>
-              <a:rPr lang="en-US"/>
+              <a:rPr lang="en-US" smtClean="0"/>
               <a:t>Click to edit Master text styles</a:t>
             </a:r>
           </a:p>
           <a:p>
             <a:pPr lvl="1"/>
             <a:r>
-              <a:rPr lang="en-US"/>
+              <a:rPr lang="en-US" smtClean="0"/>
               <a:t>Second level</a:t>
             </a:r>
           </a:p>
           <a:p>
             <a:pPr lvl="2"/>
             <a:r>
-              <a:rPr lang="en-US"/>
+              <a:rPr lang="en-US" smtClean="0"/>
               <a:t>Third level</a:t>
             </a:r>
           </a:p>
           <a:p>
             <a:pPr lvl="3"/>
             <a:r>
-              <a:rPr lang="en-US"/>
+              <a:rPr lang="en-US" smtClean="0"/>
               <a:t>Fourth level</a:t>
             </a:r>
           </a:p>
           <a:p>
             <a:pPr lvl="4"/>
             <a:r>
-              <a:rPr lang="en-US"/>
+              <a:rPr lang="en-US" smtClean="0"/>
               <a:t>Fifth level</a:t>
             </a:r>
+            <a:endParaRPr lang="en-US"/>
           </a:p>
         </p:txBody>
       </p:sp>
@@ -470,7 +458,7 @@
           <a:p>
             <a:fld id="{5BCAD085-E8A6-8845-BD4E-CB4CCA059FC4}" type="datetimeFigureOut">
               <a:rPr lang="en-US" smtClean="0"/>
-              <a:t>8/17/26</a:t>
+              <a:t>1/27/13</a:t>
             </a:fld>
             <a:endParaRPr lang="en-US"/>
           </a:p>
@@ -569,9 +557,10 @@
           <a:lstStyle/>
           <a:p>
             <a:r>
-              <a:rPr lang="en-US"/>
+              <a:rPr lang="en-US" smtClean="0"/>
               <a:t>Click to edit Master title style</a:t>
             </a:r>
+            <a:endParaRPr lang="en-US"/>
           </a:p>
         </p:txBody>
       </p:sp>
@@ -597,37 +586,38 @@
           <a:p>
             <a:pPr lvl="0"/>
             <a:r>
-              <a:rPr lang="en-US"/>
+              <a:rPr lang="en-US" smtClean="0"/>
               <a:t>Click to edit Master text styles</a:t>
             </a:r>
           </a:p>
           <a:p>
             <a:pPr lvl="1"/>
             <a:r>
-              <a:rPr lang="en-US"/>
+              <a:rPr lang="en-US" smtClean="0"/>
               <a:t>Second level</a:t>
             </a:r>
           </a:p>
           <a:p>
             <a:pPr lvl="2"/>
             <a:r>
-              <a:rPr lang="en-US"/>
+              <a:rPr lang="en-US" smtClean="0"/>
               <a:t>Third level</a:t>
             </a:r>
           </a:p>
           <a:p>
             <a:pPr lvl="3"/>
             <a:r>
-              <a:rPr lang="en-US"/>
+              <a:rPr lang="en-US" smtClean="0"/>
               <a:t>Fourth level</a:t>
             </a:r>
           </a:p>
           <a:p>
             <a:pPr lvl="4"/>
             <a:r>
-              <a:rPr lang="en-US"/>
+              <a:rPr lang="en-US" smtClean="0"/>
               <a:t>Fifth level</a:t>
             </a:r>
+            <a:endParaRPr lang="en-US"/>
           </a:p>
         </p:txBody>
       </p:sp>
@@ -648,7 +638,7 @@
           <a:p>
             <a:fld id="{5BCAD085-E8A6-8845-BD4E-CB4CCA059FC4}" type="datetimeFigureOut">
               <a:rPr lang="en-US" smtClean="0"/>
-              <a:t>8/17/26</a:t>
+              <a:t>1/27/13</a:t>
             </a:fld>
             <a:endParaRPr lang="en-US"/>
           </a:p>
@@ -742,9 +732,10 @@
           <a:lstStyle/>
           <a:p>
             <a:r>
-              <a:rPr lang="en-US"/>
+              <a:rPr lang="en-US" smtClean="0"/>
               <a:t>Click to edit Master title style</a:t>
             </a:r>
+            <a:endParaRPr lang="en-US"/>
           </a:p>
         </p:txBody>
       </p:sp>
@@ -765,37 +756,38 @@
           <a:p>
             <a:pPr lvl="0"/>
             <a:r>
-              <a:rPr lang="en-US"/>
+              <a:rPr lang="en-US" smtClean="0"/>
               <a:t>Click to edit Master text styles</a:t>
             </a:r>
           </a:p>
           <a:p>
             <a:pPr lvl="1"/>
             <a:r>
-              <a:rPr lang="en-US"/>
+              <a:rPr lang="en-US" smtClean="0"/>
               <a:t>Second level</a:t>
             </a:r>
           </a:p>
           <a:p>
             <a:pPr lvl="2"/>
             <a:r>
-              <a:rPr lang="en-US"/>
+              <a:rPr lang="en-US" smtClean="0"/>
               <a:t>Third level</a:t>
             </a:r>
           </a:p>
           <a:p>
             <a:pPr lvl="3"/>
             <a:r>
-              <a:rPr lang="en-US"/>
+              <a:rPr lang="en-US" smtClean="0"/>
               <a:t>Fourth level</a:t>
             </a:r>
           </a:p>
           <a:p>
             <a:pPr lvl="4"/>
             <a:r>
-              <a:rPr lang="en-US"/>
+              <a:rPr lang="en-US" smtClean="0"/>
               <a:t>Fifth level</a:t>
             </a:r>
+            <a:endParaRPr lang="en-US"/>
           </a:p>
         </p:txBody>
       </p:sp>
@@ -816,7 +808,7 @@
           <a:p>
             <a:fld id="{5BCAD085-E8A6-8845-BD4E-CB4CCA059FC4}" type="datetimeFigureOut">
               <a:rPr lang="en-US" smtClean="0"/>
-              <a:t>8/17/26</a:t>
+              <a:t>1/27/13</a:t>
             </a:fld>
             <a:endParaRPr lang="en-US"/>
           </a:p>
@@ -919,9 +911,10 @@
           </a:lstStyle>
           <a:p>
             <a:r>
-              <a:rPr lang="en-US"/>
+              <a:rPr lang="en-US" smtClean="0"/>
               <a:t>Click to edit Master title style</a:t>
             </a:r>
+            <a:endParaRPr lang="en-US"/>
           </a:p>
         </p:txBody>
       </p:sp>
@@ -1038,7 +1031,7 @@
           <a:p>
             <a:pPr lvl="0"/>
             <a:r>
-              <a:rPr lang="en-US"/>
+              <a:rPr lang="en-US" smtClean="0"/>
               <a:t>Click to edit Master text styles</a:t>
             </a:r>
           </a:p>
@@ -1061,7 +1054,7 @@
           <a:p>
             <a:fld id="{5BCAD085-E8A6-8845-BD4E-CB4CCA059FC4}" type="datetimeFigureOut">
               <a:rPr lang="en-US" smtClean="0"/>
-              <a:t>8/17/26</a:t>
+              <a:t>1/27/13</a:t>
             </a:fld>
             <a:endParaRPr lang="en-US"/>
           </a:p>
@@ -1155,9 +1148,10 @@
           <a:lstStyle/>
           <a:p>
             <a:r>
-              <a:rPr lang="en-US"/>
+              <a:rPr lang="en-US" smtClean="0"/>
               <a:t>Click to edit Master title style</a:t>
             </a:r>
+            <a:endParaRPr lang="en-US"/>
           </a:p>
         </p:txBody>
       </p:sp>
@@ -1211,37 +1205,38 @@
           <a:p>
             <a:pPr lvl="0"/>
             <a:r>
-              <a:rPr lang="en-US"/>
+              <a:rPr lang="en-US" smtClean="0"/>
               <a:t>Click to edit Master text styles</a:t>
             </a:r>
           </a:p>
           <a:p>
             <a:pPr lvl="1"/>
             <a:r>
-              <a:rPr lang="en-US"/>
+              <a:rPr lang="en-US" smtClean="0"/>
               <a:t>Second level</a:t>
             </a:r>
           </a:p>
           <a:p>
             <a:pPr lvl="2"/>
             <a:r>
-              <a:rPr lang="en-US"/>
+              <a:rPr lang="en-US" smtClean="0"/>
               <a:t>Third level</a:t>
             </a:r>
           </a:p>
           <a:p>
             <a:pPr lvl="3"/>
             <a:r>
-              <a:rPr lang="en-US"/>
+              <a:rPr lang="en-US" smtClean="0"/>
               <a:t>Fourth level</a:t>
             </a:r>
           </a:p>
           <a:p>
             <a:pPr lvl="4"/>
             <a:r>
-              <a:rPr lang="en-US"/>
+              <a:rPr lang="en-US" smtClean="0"/>
               <a:t>Fifth level</a:t>
             </a:r>
+            <a:endParaRPr lang="en-US"/>
           </a:p>
         </p:txBody>
       </p:sp>
@@ -1295,37 +1290,38 @@
           <a:p>
             <a:pPr lvl="0"/>
             <a:r>
-              <a:rPr lang="en-US"/>
+              <a:rPr lang="en-US" smtClean="0"/>
               <a:t>Click to edit Master text styles</a:t>
             </a:r>
           </a:p>
           <a:p>
             <a:pPr lvl="1"/>
             <a:r>
-              <a:rPr lang="en-US"/>
+              <a:rPr lang="en-US" smtClean="0"/>
               <a:t>Second level</a:t>
             </a:r>
           </a:p>
           <a:p>
             <a:pPr lvl="2"/>
             <a:r>
-              <a:rPr lang="en-US"/>
+              <a:rPr lang="en-US" smtClean="0"/>
               <a:t>Third level</a:t>
             </a:r>
           </a:p>
           <a:p>
             <a:pPr lvl="3"/>
             <a:r>
-              <a:rPr lang="en-US"/>
+              <a:rPr lang="en-US" smtClean="0"/>
               <a:t>Fourth level</a:t>
             </a:r>
           </a:p>
           <a:p>
             <a:pPr lvl="4"/>
             <a:r>
-              <a:rPr lang="en-US"/>
+              <a:rPr lang="en-US" smtClean="0"/>
               <a:t>Fifth level</a:t>
             </a:r>
+            <a:endParaRPr lang="en-US"/>
           </a:p>
         </p:txBody>
       </p:sp>
@@ -1346,7 +1342,7 @@
           <a:p>
             <a:fld id="{5BCAD085-E8A6-8845-BD4E-CB4CCA059FC4}" type="datetimeFigureOut">
               <a:rPr lang="en-US" smtClean="0"/>
-              <a:t>8/17/26</a:t>
+              <a:t>1/27/13</a:t>
             </a:fld>
             <a:endParaRPr lang="en-US"/>
           </a:p>
@@ -1444,9 +1440,10 @@
           </a:lstStyle>
           <a:p>
             <a:r>
-              <a:rPr lang="en-US"/>
+              <a:rPr lang="en-US" smtClean="0"/>
               <a:t>Click to edit Master title style</a:t>
             </a:r>
+            <a:endParaRPr lang="en-US"/>
           </a:p>
         </p:txBody>
       </p:sp>
@@ -1509,7 +1506,7 @@
           <a:p>
             <a:pPr lvl="0"/>
             <a:r>
-              <a:rPr lang="en-US"/>
+              <a:rPr lang="en-US" smtClean="0"/>
               <a:t>Click to edit Master text styles</a:t>
             </a:r>
           </a:p>
@@ -1565,37 +1562,38 @@
           <a:p>
             <a:pPr lvl="0"/>
             <a:r>
-              <a:rPr lang="en-US"/>
+              <a:rPr lang="en-US" smtClean="0"/>
               <a:t>Click to edit Master text styles</a:t>
             </a:r>
           </a:p>
           <a:p>
             <a:pPr lvl="1"/>
             <a:r>
-              <a:rPr lang="en-US"/>
+              <a:rPr lang="en-US" smtClean="0"/>
               <a:t>Second level</a:t>
             </a:r>
           </a:p>
           <a:p>
             <a:pPr lvl="2"/>
             <a:r>
-              <a:rPr lang="en-US"/>
+              <a:rPr lang="en-US" smtClean="0"/>
               <a:t>Third level</a:t>
             </a:r>
           </a:p>
           <a:p>
             <a:pPr lvl="3"/>
             <a:r>
-              <a:rPr lang="en-US"/>
+              <a:rPr lang="en-US" smtClean="0"/>
               <a:t>Fourth level</a:t>
             </a:r>
           </a:p>
           <a:p>
             <a:pPr lvl="4"/>
             <a:r>
-              <a:rPr lang="en-US"/>
+              <a:rPr lang="en-US" smtClean="0"/>
               <a:t>Fifth level</a:t>
             </a:r>
+            <a:endParaRPr lang="en-US"/>
           </a:p>
         </p:txBody>
       </p:sp>
@@ -1658,7 +1656,7 @@
           <a:p>
             <a:pPr lvl="0"/>
             <a:r>
-              <a:rPr lang="en-US"/>
+              <a:rPr lang="en-US" smtClean="0"/>
               <a:t>Click to edit Master text styles</a:t>
             </a:r>
           </a:p>
@@ -1714,37 +1712,38 @@
           <a:p>
             <a:pPr lvl="0"/>
             <a:r>
-              <a:rPr lang="en-US"/>
+              <a:rPr lang="en-US" smtClean="0"/>
               <a:t>Click to edit Master text styles</a:t>
             </a:r>
           </a:p>
           <a:p>
             <a:pPr lvl="1"/>
             <a:r>
-              <a:rPr lang="en-US"/>
+              <a:rPr lang="en-US" smtClean="0"/>
               <a:t>Second level</a:t>
             </a:r>
           </a:p>
           <a:p>
             <a:pPr lvl="2"/>
             <a:r>
-              <a:rPr lang="en-US"/>
+              <a:rPr lang="en-US" smtClean="0"/>
               <a:t>Third level</a:t>
             </a:r>
           </a:p>
           <a:p>
             <a:pPr lvl="3"/>
             <a:r>
-              <a:rPr lang="en-US"/>
+              <a:rPr lang="en-US" smtClean="0"/>
               <a:t>Fourth level</a:t>
             </a:r>
           </a:p>
           <a:p>
             <a:pPr lvl="4"/>
             <a:r>
-              <a:rPr lang="en-US"/>
+              <a:rPr lang="en-US" smtClean="0"/>
               <a:t>Fifth level</a:t>
             </a:r>
+            <a:endParaRPr lang="en-US"/>
           </a:p>
         </p:txBody>
       </p:sp>
@@ -1765,7 +1764,7 @@
           <a:p>
             <a:fld id="{5BCAD085-E8A6-8845-BD4E-CB4CCA059FC4}" type="datetimeFigureOut">
               <a:rPr lang="en-US" smtClean="0"/>
-              <a:t>8/17/26</a:t>
+              <a:t>1/27/13</a:t>
             </a:fld>
             <a:endParaRPr lang="en-US"/>
           </a:p>
@@ -1859,9 +1858,10 @@
           <a:lstStyle/>
           <a:p>
             <a:r>
-              <a:rPr lang="en-US"/>
+              <a:rPr lang="en-US" smtClean="0"/>
               <a:t>Click to edit Master title style</a:t>
             </a:r>
+            <a:endParaRPr lang="en-US"/>
           </a:p>
         </p:txBody>
       </p:sp>
@@ -1882,7 +1882,7 @@
           <a:p>
             <a:fld id="{5BCAD085-E8A6-8845-BD4E-CB4CCA059FC4}" type="datetimeFigureOut">
               <a:rPr lang="en-US" smtClean="0"/>
-              <a:t>8/17/26</a:t>
+              <a:t>1/27/13</a:t>
             </a:fld>
             <a:endParaRPr lang="en-US"/>
           </a:p>
@@ -1977,7 +1977,7 @@
           <a:p>
             <a:fld id="{5BCAD085-E8A6-8845-BD4E-CB4CCA059FC4}" type="datetimeFigureOut">
               <a:rPr lang="en-US" smtClean="0"/>
-              <a:t>8/17/26</a:t>
+              <a:t>1/27/13</a:t>
             </a:fld>
             <a:endParaRPr lang="en-US"/>
           </a:p>
@@ -2080,9 +2080,10 @@
           </a:lstStyle>
           <a:p>
             <a:r>
-              <a:rPr lang="en-US"/>
+              <a:rPr lang="en-US" smtClean="0"/>
               <a:t>Click to edit Master title style</a:t>
             </a:r>
+            <a:endParaRPr lang="en-US"/>
           </a:p>
         </p:txBody>
       </p:sp>
@@ -2136,37 +2137,38 @@
           <a:p>
             <a:pPr lvl="0"/>
             <a:r>
-              <a:rPr lang="en-US"/>
+              <a:rPr lang="en-US" smtClean="0"/>
               <a:t>Click to edit Master text styles</a:t>
             </a:r>
           </a:p>
           <a:p>
             <a:pPr lvl="1"/>
             <a:r>
-              <a:rPr lang="en-US"/>
+              <a:rPr lang="en-US" smtClean="0"/>
               <a:t>Second level</a:t>
             </a:r>
           </a:p>
           <a:p>
             <a:pPr lvl="2"/>
             <a:r>
-              <a:rPr lang="en-US"/>
+              <a:rPr lang="en-US" smtClean="0"/>
               <a:t>Third level</a:t>
             </a:r>
           </a:p>
           <a:p>
             <a:pPr lvl="3"/>
             <a:r>
-              <a:rPr lang="en-US"/>
+              <a:rPr lang="en-US" smtClean="0"/>
               <a:t>Fourth level</a:t>
             </a:r>
           </a:p>
           <a:p>
             <a:pPr lvl="4"/>
             <a:r>
-              <a:rPr lang="en-US"/>
+              <a:rPr lang="en-US" smtClean="0"/>
               <a:t>Fifth level</a:t>
             </a:r>
+            <a:endParaRPr lang="en-US"/>
           </a:p>
         </p:txBody>
       </p:sp>
@@ -2229,7 +2231,7 @@
           <a:p>
             <a:pPr lvl="0"/>
             <a:r>
-              <a:rPr lang="en-US"/>
+              <a:rPr lang="en-US" smtClean="0"/>
               <a:t>Click to edit Master text styles</a:t>
             </a:r>
           </a:p>
@@ -2252,7 +2254,7 @@
           <a:p>
             <a:fld id="{5BCAD085-E8A6-8845-BD4E-CB4CCA059FC4}" type="datetimeFigureOut">
               <a:rPr lang="en-US" smtClean="0"/>
-              <a:t>8/17/26</a:t>
+              <a:t>1/27/13</a:t>
             </a:fld>
             <a:endParaRPr lang="en-US"/>
           </a:p>
@@ -2355,9 +2357,10 @@
           </a:lstStyle>
           <a:p>
             <a:r>
-              <a:rPr lang="en-US"/>
+              <a:rPr lang="en-US" smtClean="0"/>
               <a:t>Click to edit Master title style</a:t>
             </a:r>
+            <a:endParaRPr lang="en-US"/>
           </a:p>
         </p:txBody>
       </p:sp>
@@ -2481,7 +2484,7 @@
           <a:p>
             <a:pPr lvl="0"/>
             <a:r>
-              <a:rPr lang="en-US"/>
+              <a:rPr lang="en-US" smtClean="0"/>
               <a:t>Click to edit Master text styles</a:t>
             </a:r>
           </a:p>
@@ -2504,7 +2507,7 @@
           <a:p>
             <a:fld id="{5BCAD085-E8A6-8845-BD4E-CB4CCA059FC4}" type="datetimeFigureOut">
               <a:rPr lang="en-US" smtClean="0"/>
-              <a:t>8/17/26</a:t>
+              <a:t>1/27/13</a:t>
             </a:fld>
             <a:endParaRPr lang="en-US"/>
           </a:p>
@@ -2613,9 +2616,10 @@
           <a:lstStyle/>
           <a:p>
             <a:r>
-              <a:rPr lang="en-US"/>
+              <a:rPr lang="en-US" smtClean="0"/>
               <a:t>Click to edit Master title style</a:t>
             </a:r>
+            <a:endParaRPr lang="en-US"/>
           </a:p>
         </p:txBody>
       </p:sp>
@@ -2646,37 +2650,38 @@
           <a:p>
             <a:pPr lvl="0"/>
             <a:r>
-              <a:rPr lang="en-US"/>
+              <a:rPr lang="en-US" smtClean="0"/>
               <a:t>Click to edit Master text styles</a:t>
             </a:r>
           </a:p>
           <a:p>
             <a:pPr lvl="1"/>
             <a:r>
-              <a:rPr lang="en-US"/>
+              <a:rPr lang="en-US" smtClean="0"/>
               <a:t>Second level</a:t>
             </a:r>
           </a:p>
           <a:p>
             <a:pPr lvl="2"/>
             <a:r>
-              <a:rPr lang="en-US"/>
+              <a:rPr lang="en-US" smtClean="0"/>
               <a:t>Third level</a:t>
             </a:r>
           </a:p>
           <a:p>
             <a:pPr lvl="3"/>
             <a:r>
-              <a:rPr lang="en-US"/>
+              <a:rPr lang="en-US" smtClean="0"/>
               <a:t>Fourth level</a:t>
             </a:r>
           </a:p>
           <a:p>
             <a:pPr lvl="4"/>
             <a:r>
-              <a:rPr lang="en-US"/>
+              <a:rPr lang="en-US" smtClean="0"/>
               <a:t>Fifth level</a:t>
             </a:r>
+            <a:endParaRPr lang="en-US"/>
           </a:p>
         </p:txBody>
       </p:sp>
@@ -2715,7 +2720,7 @@
           <a:p>
             <a:fld id="{5BCAD085-E8A6-8845-BD4E-CB4CCA059FC4}" type="datetimeFigureOut">
               <a:rPr lang="en-US" smtClean="0"/>
-              <a:t>8/17/26</a:t>
+              <a:t>1/27/13</a:t>
             </a:fld>
             <a:endParaRPr lang="en-US"/>
           </a:p>
@@ -3074,7 +3079,7 @@
 </file>
 
 <file path=ppt/slides/slide1.xml><?xml version="1.0" encoding="utf-8"?>
-<p:sld xmlns:a="http://schemas.openxmlformats.org/drawingml/2006/main" xmlns:r="http://schemas.openxmlformats.org/officeDocument/2006/relationships" xmlns:p="http://schemas.openxmlformats.org/presentationml/2006/main">
+<p:sld xmlns:a="http://schemas.openxmlformats.org/drawingml/2006/main" xmlns:p="http://schemas.openxmlformats.org/presentationml/2006/main" xmlns:r="http://schemas.openxmlformats.org/officeDocument/2006/relationships">
   <p:cSld>
     <p:spTree>
       <p:nvGrpSpPr>
@@ -3082,14 +3087,69 @@
         <p:cNvGrpSpPr/>
         <p:nvPr/>
       </p:nvGrpSpPr>
-      <p:grpSpPr>
-        <a:xfrm>
-          <a:off x="0" y="0"/>
-          <a:ext cx="0" cy="0"/>
-          <a:chOff x="0" y="0"/>
-          <a:chExt cx="0" cy="0"/>
-        </a:xfrm>
-      </p:grpSpPr>
+      <p:grpSpPr/>
+      <p:sp>
+        <p:nvSpPr>
+          <p:cNvPr id="2" name="TextBox 1"/>
+          <p:cNvSpPr txBox="1"/>
+          <p:nvPr/>
+        </p:nvSpPr>
+        <p:spPr>
+          <a:xfrm>
+            <a:off x="384048" y="219456"/>
+            <a:ext cx="11423599" cy="457200"/>
+          </a:xfrm>
+          <a:prstGeom prst="rect">
+            <a:avLst/>
+          </a:prstGeom>
+          <a:noFill/>
+        </p:spPr>
+        <p:txBody>
+          <a:bodyPr wrap="none">
+            <a:spAutoFit/>
+          </a:bodyPr>
+          <a:lstStyle/>
+          <a:p>
+            <a:r>
+              <a:rPr sz="2000" b="1" i="0" baseline="0">
+                <a:latin typeface="Calibri"/>
+              </a:rPr>
+              <a:t>PD21 — Per-season $\rho^*$ and empirical $H_{\mathrm{sort}}$ (contrast: ppm0lt20 — not for calibration)</a:t>
+            </a:r>
+          </a:p>
+        </p:txBody>
+      </p:sp>
+      <p:sp>
+        <p:nvSpPr>
+          <p:cNvPr id="3" name="TextBox 2"/>
+          <p:cNvSpPr txBox="1"/>
+          <p:nvPr/>
+        </p:nvSpPr>
+        <p:spPr>
+          <a:xfrm>
+            <a:off x="384048" y="713232"/>
+            <a:ext cx="11423599" cy="246888"/>
+          </a:xfrm>
+          <a:prstGeom prst="rect">
+            <a:avLst/>
+          </a:prstGeom>
+          <a:noFill/>
+        </p:spPr>
+        <p:txBody>
+          <a:bodyPr wrap="none">
+            <a:spAutoFit/>
+          </a:bodyPr>
+          <a:lstStyle/>
+          <a:p>
+            <a:r>
+              <a:rPr sz="1000" b="0" i="0" baseline="0">
+                <a:latin typeface="Calibri"/>
+              </a:rPr>
+              <a:t>PD21 · per-season $\rho^*$ vs empirical $H_{\mathrm{sort}}$ · 2011-2021 · contrast ppm0lt20</a:t>
+            </a:r>
+          </a:p>
+        </p:txBody>
+      </p:sp>
       <p:pic>
         <p:nvPicPr>
           <p:cNvPr id="4" name="Picture 3" descr="PD21_rho_hsort_calibrate_2011_2021_ppm0lt20_bracket_rho_hsort_timeseries.png"/>
@@ -3106,1508 +3166,209 @@
         </p:blipFill>
         <p:spPr>
           <a:xfrm>
-            <a:off x="3836318" y="1014045"/>
-            <a:ext cx="8355682" cy="4486709"/>
+            <a:off x="2417574" y="1051560"/>
+            <a:ext cx="7356546" cy="3950208"/>
           </a:xfrm>
           <a:prstGeom prst="rect">
             <a:avLst/>
           </a:prstGeom>
         </p:spPr>
       </p:pic>
-      <mc:AlternateContent xmlns:mc="http://schemas.openxmlformats.org/markup-compatibility/2006">
-        <mc:Choice xmlns:a14="http://schemas.microsoft.com/office/drawing/2010/main" Requires="a14">
-          <p:sp>
-            <p:nvSpPr>
-              <p:cNvPr id="2" name="TextBox 1"/>
-              <p:cNvSpPr txBox="1"/>
-              <p:nvPr/>
-            </p:nvSpPr>
-            <p:spPr>
-              <a:xfrm>
-                <a:off x="384048" y="219456"/>
-                <a:ext cx="9177321" cy="400110"/>
-              </a:xfrm>
-              <a:prstGeom prst="rect">
-                <a:avLst/>
-              </a:prstGeom>
-              <a:noFill/>
-            </p:spPr>
-            <p:txBody>
-              <a:bodyPr wrap="none">
-                <a:spAutoFit/>
-              </a:bodyPr>
-              <a:lstStyle/>
-              <a:p>
-                <a:r>
-                  <a:rPr lang="en-US" sz="2000" b="1" dirty="0">
-                    <a:latin typeface="Calibri"/>
-                  </a:rPr>
-                  <a:t>PD21 — Per-season </a:t>
-                </a:r>
-                <a14:m>
-                  <m:oMath xmlns:m="http://schemas.openxmlformats.org/officeDocument/2006/math">
-                    <m:sSup>
-                      <m:sSupPr>
-                        <m:ctrlPr>
-                          <a:rPr lang="en-US" sz="2000" b="1" i="1" dirty="0">
-                            <a:latin typeface="Cambria Math" panose="02040503050406030204" pitchFamily="18" charset="0"/>
-                          </a:rPr>
-                        </m:ctrlPr>
-                      </m:sSupPr>
-                      <m:e>
-                        <m:r>
-                          <a:rPr lang="en-US" sz="2000" b="1" i="1" dirty="0">
-                            <a:latin typeface="Cambria Math" panose="02040503050406030204" pitchFamily="18" charset="0"/>
-                          </a:rPr>
-                          <m:t>𝜌</m:t>
-                        </m:r>
-                      </m:e>
-                      <m:sup>
-                        <m:r>
-                          <a:rPr lang="en-US" sz="2000" b="1" i="0" dirty="0">
-                            <a:latin typeface="Cambria Math" panose="02040503050406030204" pitchFamily="18" charset="0"/>
-                          </a:rPr>
-                          <m:t>∗</m:t>
-                        </m:r>
-                      </m:sup>
-                    </m:sSup>
-                  </m:oMath>
-                </a14:m>
-                <a:r>
-                  <a:rPr lang="en-US" sz="2000" b="1" dirty="0">
-                    <a:latin typeface="Calibri"/>
-                  </a:rPr>
-                  <a:t> and empirical </a:t>
-                </a:r>
-                <a14:m>
-                  <m:oMath xmlns:m="http://schemas.openxmlformats.org/officeDocument/2006/math">
-                    <m:sSub>
-                      <m:sSubPr>
-                        <m:ctrlPr>
-                          <a:rPr lang="en-US" sz="2000" b="1" i="1" dirty="0">
-                            <a:latin typeface="Cambria Math" panose="02040503050406030204" pitchFamily="18" charset="0"/>
-                          </a:rPr>
-                        </m:ctrlPr>
-                      </m:sSubPr>
-                      <m:e>
-                        <m:r>
-                          <a:rPr lang="en-US" sz="2000" b="1" i="1" dirty="0">
-                            <a:latin typeface="Cambria Math" panose="02040503050406030204" pitchFamily="18" charset="0"/>
-                          </a:rPr>
-                          <m:t>𝐻</m:t>
-                        </m:r>
-                      </m:e>
-                      <m:sub>
-                        <m:r>
-                          <m:rPr>
-                            <m:sty m:val="p"/>
-                          </m:rPr>
-                          <a:rPr lang="en-US" sz="2000" b="1" i="0" dirty="0">
-                            <a:latin typeface="Cambria Math" panose="02040503050406030204" pitchFamily="18" charset="0"/>
-                          </a:rPr>
-                          <m:t>sort</m:t>
-                        </m:r>
-                      </m:sub>
-                    </m:sSub>
-                  </m:oMath>
-                </a14:m>
-                <a:r>
-                  <a:rPr lang="en-US" sz="2000" b="1" dirty="0">
-                    <a:latin typeface="Calibri"/>
-                  </a:rPr>
-                  <a:t> (contrast: </a:t>
-                </a:r>
-                <a14:m>
-                  <m:oMath xmlns:m="http://schemas.openxmlformats.org/officeDocument/2006/math">
-                    <m:r>
-                      <a:rPr lang="en-US" sz="2000" b="1" i="1" dirty="0" smtClean="0">
-                        <a:latin typeface="Cambria Math" panose="02040503050406030204" pitchFamily="18" charset="0"/>
-                      </a:rPr>
-                      <m:t>𝑝𝑝𝑚</m:t>
-                    </m:r>
-                    <m:r>
-                      <a:rPr lang="en-US" sz="2000" b="1" i="0" dirty="0">
-                        <a:latin typeface="Cambria Math" panose="02040503050406030204" pitchFamily="18" charset="0"/>
-                      </a:rPr>
-                      <m:t>0</m:t>
-                    </m:r>
-                    <m:r>
-                      <a:rPr lang="en-US" sz="2000" b="1" i="1" dirty="0">
-                        <a:latin typeface="Cambria Math" panose="02040503050406030204" pitchFamily="18" charset="0"/>
-                      </a:rPr>
-                      <m:t>𝑙𝑡</m:t>
-                    </m:r>
-                    <m:r>
-                      <a:rPr lang="en-US" sz="2000" b="1" i="0" dirty="0">
-                        <a:latin typeface="Cambria Math" panose="02040503050406030204" pitchFamily="18" charset="0"/>
-                      </a:rPr>
-                      <m:t>20</m:t>
-                    </m:r>
-                  </m:oMath>
-                </a14:m>
-                <a:r>
-                  <a:rPr lang="en-US" sz="2000" b="1" dirty="0">
-                    <a:latin typeface="Calibri"/>
-                  </a:rPr>
-                  <a:t> — not for calibration)</a:t>
-                </a:r>
-              </a:p>
-            </p:txBody>
-          </p:sp>
-        </mc:Choice>
-        <mc:Fallback>
-          <p:sp>
-            <p:nvSpPr>
-              <p:cNvPr id="2" name="TextBox 1"/>
-              <p:cNvSpPr txBox="1">
-                <a:spLocks noRot="1" noChangeAspect="1" noMove="1" noResize="1" noEditPoints="1" noAdjustHandles="1" noChangeArrowheads="1" noChangeShapeType="1" noTextEdit="1"/>
-              </p:cNvSpPr>
-              <p:nvPr/>
-            </p:nvSpPr>
-            <p:spPr>
-              <a:xfrm>
-                <a:off x="384048" y="219456"/>
-                <a:ext cx="9177321" cy="400110"/>
-              </a:xfrm>
-              <a:prstGeom prst="rect">
-                <a:avLst/>
-              </a:prstGeom>
-              <a:blipFill>
-                <a:blip r:embed="rId3"/>
-                <a:stretch>
-                  <a:fillRect l="-692" t="-9375" r="-692" b="-28125"/>
-                </a:stretch>
-              </a:blipFill>
-            </p:spPr>
-            <p:txBody>
-              <a:bodyPr/>
-              <a:lstStyle/>
-              <a:p>
-                <a:r>
-                  <a:rPr lang="en-US">
-                    <a:noFill/>
-                  </a:rPr>
-                  <a:t> </a:t>
-                </a:r>
-              </a:p>
-            </p:txBody>
-          </p:sp>
-        </mc:Fallback>
-      </mc:AlternateContent>
-      <mc:AlternateContent xmlns:mc="http://schemas.openxmlformats.org/markup-compatibility/2006">
-        <mc:Choice xmlns:a14="http://schemas.microsoft.com/office/drawing/2010/main" Requires="a14">
-          <p:sp>
-            <p:nvSpPr>
-              <p:cNvPr id="3" name="TextBox 2"/>
-              <p:cNvSpPr txBox="1"/>
-              <p:nvPr/>
-            </p:nvSpPr>
-            <p:spPr>
-              <a:xfrm>
-                <a:off x="384048" y="713232"/>
-                <a:ext cx="3986541" cy="246221"/>
-              </a:xfrm>
-              <a:prstGeom prst="rect">
-                <a:avLst/>
-              </a:prstGeom>
-              <a:noFill/>
-            </p:spPr>
-            <p:txBody>
-              <a:bodyPr wrap="none">
-                <a:spAutoFit/>
-              </a:bodyPr>
-              <a:lstStyle/>
-              <a:p>
-                <a:r>
-                  <a:rPr lang="en-US" sz="1000" dirty="0">
-                    <a:latin typeface="Calibri"/>
-                  </a:rPr>
-                  <a:t>PD21 · per-season </a:t>
-                </a:r>
-                <a14:m>
-                  <m:oMath xmlns:m="http://schemas.openxmlformats.org/officeDocument/2006/math">
-                    <m:sSup>
-                      <m:sSupPr>
-                        <m:ctrlPr>
-                          <a:rPr lang="en-US" sz="1000" i="1" dirty="0">
-                            <a:latin typeface="Cambria Math" panose="02040503050406030204" pitchFamily="18" charset="0"/>
-                          </a:rPr>
-                        </m:ctrlPr>
-                      </m:sSupPr>
-                      <m:e>
-                        <m:r>
-                          <a:rPr lang="en-US" sz="1000" i="1" dirty="0">
-                            <a:latin typeface="Cambria Math" panose="02040503050406030204" pitchFamily="18" charset="0"/>
-                          </a:rPr>
-                          <m:t>𝜌</m:t>
-                        </m:r>
-                      </m:e>
-                      <m:sup>
-                        <m:r>
-                          <a:rPr lang="en-US" sz="1000" i="0" dirty="0">
-                            <a:latin typeface="Cambria Math" panose="02040503050406030204" pitchFamily="18" charset="0"/>
-                          </a:rPr>
-                          <m:t>∗</m:t>
-                        </m:r>
-                      </m:sup>
-                    </m:sSup>
-                  </m:oMath>
-                </a14:m>
-                <a:r>
-                  <a:rPr lang="en-US" sz="1000" dirty="0">
-                    <a:latin typeface="Calibri"/>
-                  </a:rPr>
-                  <a:t> vs empirical </a:t>
-                </a:r>
-                <a14:m>
-                  <m:oMath xmlns:m="http://schemas.openxmlformats.org/officeDocument/2006/math">
-                    <m:sSub>
-                      <m:sSubPr>
-                        <m:ctrlPr>
-                          <a:rPr lang="en-US" sz="1000" i="1" dirty="0">
-                            <a:latin typeface="Cambria Math" panose="02040503050406030204" pitchFamily="18" charset="0"/>
-                          </a:rPr>
-                        </m:ctrlPr>
-                      </m:sSubPr>
-                      <m:e>
-                        <m:r>
-                          <a:rPr lang="en-US" sz="1000" i="1" dirty="0">
-                            <a:latin typeface="Cambria Math" panose="02040503050406030204" pitchFamily="18" charset="0"/>
-                          </a:rPr>
-                          <m:t>𝐻</m:t>
-                        </m:r>
-                      </m:e>
-                      <m:sub>
-                        <m:r>
-                          <m:rPr>
-                            <m:sty m:val="p"/>
-                          </m:rPr>
-                          <a:rPr lang="en-US" sz="1000" i="0" dirty="0">
-                            <a:latin typeface="Cambria Math" panose="02040503050406030204" pitchFamily="18" charset="0"/>
-                          </a:rPr>
-                          <m:t>sort</m:t>
-                        </m:r>
-                      </m:sub>
-                    </m:sSub>
-                  </m:oMath>
-                </a14:m>
-                <a:r>
-                  <a:rPr lang="en-US" sz="1000" dirty="0">
-                    <a:latin typeface="Calibri"/>
-                  </a:rPr>
-                  <a:t> · 2011-2021 · contrast </a:t>
-                </a:r>
-                <a14:m>
-                  <m:oMath xmlns:m="http://schemas.openxmlformats.org/officeDocument/2006/math">
-                    <m:r>
-                      <a:rPr lang="en-US" sz="1000" i="1" dirty="0" smtClean="0">
-                        <a:latin typeface="Cambria Math" panose="02040503050406030204" pitchFamily="18" charset="0"/>
-                      </a:rPr>
-                      <m:t>𝑝𝑝𝑚</m:t>
-                    </m:r>
-                    <m:r>
-                      <a:rPr lang="en-US" sz="1000" i="0" dirty="0">
-                        <a:latin typeface="Cambria Math" panose="02040503050406030204" pitchFamily="18" charset="0"/>
-                      </a:rPr>
-                      <m:t>0</m:t>
-                    </m:r>
-                    <m:r>
-                      <a:rPr lang="en-US" sz="1000" i="1" dirty="0">
-                        <a:latin typeface="Cambria Math" panose="02040503050406030204" pitchFamily="18" charset="0"/>
-                      </a:rPr>
-                      <m:t>𝑙𝑡</m:t>
-                    </m:r>
-                    <m:r>
-                      <a:rPr lang="en-US" sz="1000" i="0" dirty="0">
-                        <a:latin typeface="Cambria Math" panose="02040503050406030204" pitchFamily="18" charset="0"/>
-                      </a:rPr>
-                      <m:t>20</m:t>
-                    </m:r>
-                  </m:oMath>
-                </a14:m>
-                <a:endParaRPr lang="en-US" sz="1000" dirty="0">
-                  <a:latin typeface="Calibri"/>
-                </a:endParaRPr>
-              </a:p>
-            </p:txBody>
-          </p:sp>
-        </mc:Choice>
-        <mc:Fallback>
-          <p:sp>
-            <p:nvSpPr>
-              <p:cNvPr id="3" name="TextBox 2"/>
-              <p:cNvSpPr txBox="1">
-                <a:spLocks noRot="1" noChangeAspect="1" noMove="1" noResize="1" noEditPoints="1" noAdjustHandles="1" noChangeArrowheads="1" noChangeShapeType="1" noTextEdit="1"/>
-              </p:cNvSpPr>
-              <p:nvPr/>
-            </p:nvSpPr>
-            <p:spPr>
-              <a:xfrm>
-                <a:off x="384048" y="713232"/>
-                <a:ext cx="3986541" cy="246221"/>
-              </a:xfrm>
-              <a:prstGeom prst="rect">
-                <a:avLst/>
-              </a:prstGeom>
-              <a:blipFill>
-                <a:blip r:embed="rId4"/>
-                <a:stretch>
-                  <a:fillRect b="-10000"/>
-                </a:stretch>
-              </a:blipFill>
-            </p:spPr>
-            <p:txBody>
-              <a:bodyPr/>
-              <a:lstStyle/>
-              <a:p>
-                <a:r>
-                  <a:rPr lang="en-US">
-                    <a:noFill/>
-                  </a:rPr>
-                  <a:t> </a:t>
-                </a:r>
-              </a:p>
-            </p:txBody>
-          </p:sp>
-        </mc:Fallback>
-      </mc:AlternateContent>
-      <mc:AlternateContent xmlns:mc="http://schemas.openxmlformats.org/markup-compatibility/2006">
-        <mc:Choice xmlns:a14="http://schemas.microsoft.com/office/drawing/2010/main" Requires="a14">
-          <p:sp>
-            <p:nvSpPr>
-              <p:cNvPr id="5" name="TextBox 4"/>
-              <p:cNvSpPr txBox="1"/>
-              <p:nvPr/>
-            </p:nvSpPr>
-            <p:spPr>
-              <a:xfrm>
-                <a:off x="235366" y="1149319"/>
-                <a:ext cx="3702454" cy="3409331"/>
-              </a:xfrm>
-              <a:prstGeom prst="rect">
-                <a:avLst/>
-              </a:prstGeom>
-              <a:noFill/>
-            </p:spPr>
-            <p:txBody>
-              <a:bodyPr wrap="square">
-                <a:spAutoFit/>
-              </a:bodyPr>
-              <a:lstStyle/>
-              <a:p>
-                <a:pPr>
-                  <a:lnSpc>
-                    <a:spcPct val="150000"/>
-                  </a:lnSpc>
-                  <a:buChar char="•"/>
-                </a:pPr>
-                <a:r>
-                  <a:rPr lang="en-US" sz="1000" dirty="0">
-                    <a:latin typeface="Calibri"/>
-                  </a:rPr>
-                  <a:t> PD21 contrast (Aug 2026): </a:t>
-                </a:r>
-                <a14:m>
-                  <m:oMath xmlns:m="http://schemas.openxmlformats.org/officeDocument/2006/math">
-                    <m:r>
-                      <a:rPr lang="en-US" sz="1000" i="1" dirty="0" smtClean="0">
-                        <a:latin typeface="Cambria Math" panose="02040503050406030204" pitchFamily="18" charset="0"/>
-                      </a:rPr>
-                      <m:t>𝑝𝑝𝑚</m:t>
-                    </m:r>
-                    <m:r>
-                      <a:rPr lang="en-US" sz="1000" i="0" dirty="0">
-                        <a:latin typeface="Cambria Math" panose="02040503050406030204" pitchFamily="18" charset="0"/>
-                      </a:rPr>
-                      <m:t>0</m:t>
-                    </m:r>
-                    <m:r>
-                      <a:rPr lang="en-US" sz="1000" i="1" dirty="0">
-                        <a:latin typeface="Cambria Math" panose="02040503050406030204" pitchFamily="18" charset="0"/>
-                      </a:rPr>
-                      <m:t>𝑙𝑡</m:t>
-                    </m:r>
-                    <m:r>
-                      <a:rPr lang="en-US" sz="1000" i="0" dirty="0">
-                        <a:latin typeface="Cambria Math" panose="02040503050406030204" pitchFamily="18" charset="0"/>
-                      </a:rPr>
-                      <m:t>20</m:t>
-                    </m:r>
-                  </m:oMath>
-                </a14:m>
-                <a:r>
-                  <a:rPr lang="en-US" sz="1000" dirty="0">
-                    <a:latin typeface="Calibri"/>
-                  </a:rPr>
-                  <a:t> panel — illustrative only; do not use for locked longitudinal </a:t>
-                </a:r>
-                <a14:m>
-                  <m:oMath xmlns:m="http://schemas.openxmlformats.org/officeDocument/2006/math">
-                    <m:r>
-                      <a:rPr lang="en-US" sz="1000" i="1" dirty="0" smtClean="0">
-                        <a:latin typeface="Cambria Math" panose="02040503050406030204" pitchFamily="18" charset="0"/>
-                      </a:rPr>
-                      <m:t>𝜌</m:t>
-                    </m:r>
-                  </m:oMath>
-                </a14:m>
-                <a:r>
-                  <a:rPr lang="en-US" sz="1000" dirty="0">
-                    <a:latin typeface="Calibri"/>
-                  </a:rPr>
-                  <a:t> calibration.</a:t>
-                </a:r>
-              </a:p>
-              <a:p>
-                <a:pPr>
-                  <a:lnSpc>
-                    <a:spcPct val="150000"/>
-                  </a:lnSpc>
-                  <a:buChar char="•"/>
-                </a:pPr>
-                <a:r>
-                  <a:rPr lang="en-US" sz="1000" dirty="0">
-                    <a:latin typeface="Calibri"/>
-                  </a:rPr>
-                  <a:t>  Panel: 2011–2021 MBB · all roster rows kept · raw PPM</a:t>
-                </a:r>
-                <a14:m>
-                  <m:oMath xmlns:m="http://schemas.openxmlformats.org/officeDocument/2006/math">
-                    <m:r>
-                      <a:rPr lang="en-US" sz="1000" dirty="0" smtClean="0">
-                        <a:latin typeface="Cambria Math" panose="02040503050406030204" pitchFamily="18" charset="0"/>
-                      </a:rPr>
-                      <m:t>=</m:t>
-                    </m:r>
-                    <m:r>
-                      <a:rPr lang="en-US" sz="1000" i="0" dirty="0">
-                        <a:latin typeface="Cambria Math" panose="02040503050406030204" pitchFamily="18" charset="0"/>
-                      </a:rPr>
-                      <m:t>0</m:t>
-                    </m:r>
-                  </m:oMath>
-                </a14:m>
-                <a:r>
-                  <a:rPr lang="en-US" sz="1000" dirty="0">
-                    <a:latin typeface="Calibri"/>
-                  </a:rPr>
-                  <a:t> if </a:t>
-                </a:r>
-                <a14:m>
-                  <m:oMath xmlns:m="http://schemas.openxmlformats.org/officeDocument/2006/math">
-                    <m:r>
-                      <a:rPr lang="en-US" sz="1000" i="1" dirty="0" smtClean="0">
-                        <a:latin typeface="Cambria Math" panose="02040503050406030204" pitchFamily="18" charset="0"/>
-                      </a:rPr>
-                      <m:t>𝑚𝑖𝑛𝑢𝑡𝑒𝑠</m:t>
-                    </m:r>
-                  </m:oMath>
-                </a14:m>
-                <a:r>
-                  <a:rPr lang="en-US" sz="1000" dirty="0">
-                    <a:latin typeface="Calibri"/>
-                  </a:rPr>
-                  <a:t> </a:t>
-                </a:r>
-                <a14:m>
-                  <m:oMath xmlns:m="http://schemas.openxmlformats.org/officeDocument/2006/math">
-                    <m:r>
-                      <a:rPr lang="en-US" sz="1000" dirty="0" smtClean="0">
-                        <a:latin typeface="Cambria Math" panose="02040503050406030204" pitchFamily="18" charset="0"/>
-                      </a:rPr>
-                      <m:t>&lt;</m:t>
-                    </m:r>
-                    <m:r>
-                      <a:rPr lang="en-US" sz="1000" i="0" dirty="0">
-                        <a:latin typeface="Cambria Math" panose="02040503050406030204" pitchFamily="18" charset="0"/>
-                      </a:rPr>
-                      <m:t>20</m:t>
-                    </m:r>
-                  </m:oMath>
-                </a14:m>
-                <a:r>
-                  <a:rPr lang="en-US" sz="1000" dirty="0">
-                    <a:latin typeface="Calibri"/>
-                  </a:rPr>
-                  <a:t> · no roster caps — contrast / legacy estimand only.</a:t>
-                </a:r>
-              </a:p>
-              <a:p>
-                <a:pPr>
-                  <a:lnSpc>
-                    <a:spcPct val="150000"/>
-                  </a:lnSpc>
-                  <a:buChar char="•"/>
-                </a:pPr>
-                <a:r>
-                  <a:rPr lang="en-US" sz="1000" dirty="0">
-                    <a:latin typeface="Calibri"/>
-                  </a:rPr>
-                  <a:t>  Red (left): per-season calibrated </a:t>
-                </a:r>
-                <a14:m>
-                  <m:oMath xmlns:m="http://schemas.openxmlformats.org/officeDocument/2006/math">
-                    <m:sSup>
-                      <m:sSupPr>
-                        <m:ctrlPr>
-                          <a:rPr lang="en-US" sz="1000" i="1" dirty="0">
-                            <a:latin typeface="Cambria Math" panose="02040503050406030204" pitchFamily="18" charset="0"/>
-                          </a:rPr>
-                        </m:ctrlPr>
-                      </m:sSupPr>
-                      <m:e>
-                        <m:r>
-                          <a:rPr lang="en-US" sz="1000" i="1" dirty="0">
-                            <a:latin typeface="Cambria Math" panose="02040503050406030204" pitchFamily="18" charset="0"/>
-                          </a:rPr>
-                          <m:t>𝜌</m:t>
-                        </m:r>
-                      </m:e>
-                      <m:sup>
-                        <m:r>
-                          <a:rPr lang="en-US" sz="1000" i="0" dirty="0">
-                            <a:latin typeface="Cambria Math" panose="02040503050406030204" pitchFamily="18" charset="0"/>
-                          </a:rPr>
-                          <m:t>∗</m:t>
-                        </m:r>
-                      </m:sup>
-                    </m:sSup>
-                  </m:oMath>
-                </a14:m>
-                <a:r>
-                  <a:rPr lang="en-US" sz="1000" dirty="0">
-                    <a:latin typeface="Calibri"/>
-                  </a:rPr>
-                  <a:t>; dotted red = mean </a:t>
-                </a:r>
-                <a14:m>
-                  <m:oMath xmlns:m="http://schemas.openxmlformats.org/officeDocument/2006/math">
-                    <m:sSup>
-                      <m:sSupPr>
-                        <m:ctrlPr>
-                          <a:rPr lang="en-US" sz="1000" i="1" dirty="0">
-                            <a:latin typeface="Cambria Math" panose="02040503050406030204" pitchFamily="18" charset="0"/>
-                          </a:rPr>
-                        </m:ctrlPr>
-                      </m:sSupPr>
-                      <m:e>
-                        <m:r>
-                          <a:rPr lang="en-US" sz="1000" i="1" dirty="0">
-                            <a:latin typeface="Cambria Math" panose="02040503050406030204" pitchFamily="18" charset="0"/>
-                          </a:rPr>
-                          <m:t>𝜌</m:t>
-                        </m:r>
-                      </m:e>
-                      <m:sup>
-                        <m:r>
-                          <a:rPr lang="en-US" sz="1000" i="0" dirty="0">
-                            <a:latin typeface="Cambria Math" panose="02040503050406030204" pitchFamily="18" charset="0"/>
-                          </a:rPr>
-                          <m:t>∗</m:t>
-                        </m:r>
-                      </m:sup>
-                    </m:sSup>
-                  </m:oMath>
-                </a14:m>
-                <a:r>
-                  <a:rPr lang="en-US" sz="1000" dirty="0">
-                    <a:latin typeface="Calibri"/>
-                  </a:rPr>
-                  <a:t> (</a:t>
-                </a:r>
-                <a14:m>
-                  <m:oMath xmlns:m="http://schemas.openxmlformats.org/officeDocument/2006/math">
-                    <m:r>
-                      <a:rPr lang="en-US" sz="1000" dirty="0" smtClean="0">
-                        <a:latin typeface="Cambria Math" panose="02040503050406030204" pitchFamily="18" charset="0"/>
-                      </a:rPr>
-                      <m:t>≈</m:t>
-                    </m:r>
-                    <m:r>
-                      <a:rPr lang="en-US" sz="1000" i="0" dirty="0">
-                        <a:latin typeface="Cambria Math" panose="02040503050406030204" pitchFamily="18" charset="0"/>
-                      </a:rPr>
-                      <m:t>0.477</m:t>
-                    </m:r>
-                  </m:oMath>
-                </a14:m>
-                <a:r>
-                  <a:rPr lang="en-US" sz="1000" dirty="0">
-                    <a:latin typeface="Calibri"/>
-                  </a:rPr>
-                  <a:t>). Open circles = hit </a:t>
-                </a:r>
-                <a14:m>
-                  <m:oMath xmlns:m="http://schemas.openxmlformats.org/officeDocument/2006/math">
-                    <m:sSub>
-                      <m:sSubPr>
-                        <m:ctrlPr>
-                          <a:rPr lang="en-US" sz="1000" i="1" dirty="0">
-                            <a:latin typeface="Cambria Math" panose="02040503050406030204" pitchFamily="18" charset="0"/>
-                          </a:rPr>
-                        </m:ctrlPr>
-                      </m:sSubPr>
-                      <m:e>
-                        <m:r>
-                          <a:rPr lang="en-US" sz="1000" i="1" dirty="0">
-                            <a:latin typeface="Cambria Math" panose="02040503050406030204" pitchFamily="18" charset="0"/>
-                          </a:rPr>
-                          <m:t>𝜌</m:t>
-                        </m:r>
-                      </m:e>
-                      <m:sub>
-                        <m:r>
-                          <m:rPr>
-                            <m:sty m:val="p"/>
-                          </m:rPr>
-                          <a:rPr lang="en-US" sz="1000" i="0" dirty="0">
-                            <a:latin typeface="Cambria Math" panose="02040503050406030204" pitchFamily="18" charset="0"/>
-                          </a:rPr>
-                          <m:t>max</m:t>
-                        </m:r>
-                      </m:sub>
-                    </m:sSub>
-                  </m:oMath>
-                </a14:m>
-                <a:r>
-                  <a:rPr lang="en-US" sz="1000" dirty="0">
-                    <a:latin typeface="Calibri"/>
-                  </a:rPr>
-                  <a:t> cap.</a:t>
-                </a:r>
-              </a:p>
-              <a:p>
-                <a:pPr>
-                  <a:lnSpc>
-                    <a:spcPct val="150000"/>
-                  </a:lnSpc>
-                  <a:buChar char="•"/>
-                </a:pPr>
-                <a:r>
-                  <a:rPr lang="en-US" sz="1000" dirty="0">
-                    <a:latin typeface="Calibri"/>
-                  </a:rPr>
-                  <a:t>  Blue (right): empirical </a:t>
-                </a:r>
-                <a14:m>
-                  <m:oMath xmlns:m="http://schemas.openxmlformats.org/officeDocument/2006/math">
-                    <m:sSub>
-                      <m:sSubPr>
-                        <m:ctrlPr>
-                          <a:rPr lang="en-US" sz="1000" i="1" dirty="0">
-                            <a:latin typeface="Cambria Math" panose="02040503050406030204" pitchFamily="18" charset="0"/>
-                          </a:rPr>
-                        </m:ctrlPr>
-                      </m:sSubPr>
-                      <m:e>
-                        <m:r>
-                          <a:rPr lang="en-US" sz="1000" i="1" dirty="0">
-                            <a:latin typeface="Cambria Math" panose="02040503050406030204" pitchFamily="18" charset="0"/>
-                          </a:rPr>
-                          <m:t>𝐻</m:t>
-                        </m:r>
-                      </m:e>
-                      <m:sub>
-                        <m:r>
-                          <m:rPr>
-                            <m:sty m:val="p"/>
-                          </m:rPr>
-                          <a:rPr lang="en-US" sz="1000" i="0" dirty="0">
-                            <a:latin typeface="Cambria Math" panose="02040503050406030204" pitchFamily="18" charset="0"/>
-                          </a:rPr>
-                          <m:t>sort</m:t>
-                        </m:r>
-                      </m:sub>
-                    </m:sSub>
-                  </m:oMath>
-                </a14:m>
-                <a:r>
-                  <a:rPr lang="en-US" sz="1000" dirty="0">
-                    <a:latin typeface="Calibri"/>
-                  </a:rPr>
-                  <a:t> by season; dotted blue = longitudinal mean </a:t>
-                </a:r>
-                <a14:m>
-                  <m:oMath xmlns:m="http://schemas.openxmlformats.org/officeDocument/2006/math">
-                    <m:sSubSup>
-                      <m:sSubSupPr>
-                        <m:ctrlPr>
-                          <a:rPr lang="en-US" sz="1000" i="1" dirty="0">
-                            <a:latin typeface="Cambria Math" panose="02040503050406030204" pitchFamily="18" charset="0"/>
-                          </a:rPr>
-                        </m:ctrlPr>
-                      </m:sSubSupPr>
-                      <m:e>
-                        <m:r>
-                          <a:rPr lang="en-US" sz="1000" i="1" dirty="0">
-                            <a:latin typeface="Cambria Math" panose="02040503050406030204" pitchFamily="18" charset="0"/>
-                          </a:rPr>
-                          <m:t>𝐻</m:t>
-                        </m:r>
-                      </m:e>
-                      <m:sub>
-                        <m:r>
-                          <m:rPr>
-                            <m:sty m:val="p"/>
-                          </m:rPr>
-                          <a:rPr lang="en-US" sz="1000" i="0" dirty="0">
-                            <a:latin typeface="Cambria Math" panose="02040503050406030204" pitchFamily="18" charset="0"/>
-                          </a:rPr>
-                          <m:t>sort</m:t>
-                        </m:r>
-                      </m:sub>
-                      <m:sup>
-                        <m:r>
-                          <m:rPr>
-                            <m:sty m:val="p"/>
-                          </m:rPr>
-                          <a:rPr lang="en-US" sz="1000" i="0" dirty="0">
-                            <a:latin typeface="Cambria Math" panose="02040503050406030204" pitchFamily="18" charset="0"/>
-                          </a:rPr>
-                          <m:t>emp</m:t>
-                        </m:r>
-                      </m:sup>
-                    </m:sSubSup>
-                  </m:oMath>
-                </a14:m>
-                <a:r>
-                  <a:rPr lang="en-US" sz="1000" dirty="0">
-                    <a:latin typeface="Calibri"/>
-                  </a:rPr>
-                  <a:t> (</a:t>
-                </a:r>
-                <a14:m>
-                  <m:oMath xmlns:m="http://schemas.openxmlformats.org/officeDocument/2006/math">
-                    <m:r>
-                      <a:rPr lang="en-US" sz="1000" dirty="0" smtClean="0">
-                        <a:latin typeface="Cambria Math" panose="02040503050406030204" pitchFamily="18" charset="0"/>
-                      </a:rPr>
-                      <m:t>≈</m:t>
-                    </m:r>
-                    <m:r>
-                      <a:rPr lang="en-US" sz="1000" i="0" dirty="0">
-                        <a:latin typeface="Cambria Math" panose="02040503050406030204" pitchFamily="18" charset="0"/>
-                      </a:rPr>
-                      <m:t>0.171</m:t>
-                    </m:r>
-                  </m:oMath>
-                </a14:m>
-                <a:r>
-                  <a:rPr lang="en-US" sz="1000" dirty="0">
-                    <a:latin typeface="Calibri"/>
-                  </a:rPr>
-                  <a:t>).</a:t>
-                </a:r>
-              </a:p>
-              <a:p>
-                <a:pPr>
-                  <a:lnSpc>
-                    <a:spcPct val="150000"/>
-                  </a:lnSpc>
-                  <a:buChar char="•"/>
-                </a:pPr>
-                <a:r>
-                  <a:rPr lang="en-US" sz="1000" dirty="0">
-                    <a:latin typeface="Calibri"/>
-                  </a:rPr>
-                  <a:t>  </a:t>
-                </a:r>
-                <a14:m>
-                  <m:oMath xmlns:m="http://schemas.openxmlformats.org/officeDocument/2006/math">
-                    <m:sSub>
-                      <m:sSubPr>
-                        <m:ctrlPr>
-                          <a:rPr lang="en-US" sz="1000" i="1" dirty="0">
-                            <a:latin typeface="Cambria Math" panose="02040503050406030204" pitchFamily="18" charset="0"/>
-                          </a:rPr>
-                        </m:ctrlPr>
-                      </m:sSubPr>
-                      <m:e>
-                        <m:r>
-                          <a:rPr lang="en-US" sz="1000" i="1" dirty="0">
-                            <a:latin typeface="Cambria Math" panose="02040503050406030204" pitchFamily="18" charset="0"/>
-                          </a:rPr>
-                          <m:t>𝐻</m:t>
-                        </m:r>
-                      </m:e>
-                      <m:sub>
-                        <m:r>
-                          <a:rPr lang="en-US" sz="1000" i="1" dirty="0">
-                            <a:latin typeface="Cambria Math" panose="02040503050406030204" pitchFamily="18" charset="0"/>
-                          </a:rPr>
-                          <m:t>𝑠𝑜𝑟𝑡</m:t>
-                        </m:r>
-                      </m:sub>
-                    </m:sSub>
-                    <m:r>
-                      <a:rPr lang="en-US" sz="1000" i="0" dirty="0">
-                        <a:latin typeface="Cambria Math" panose="02040503050406030204" pitchFamily="18" charset="0"/>
-                      </a:rPr>
-                      <m:t>=1−</m:t>
-                    </m:r>
-                    <m:nary>
-                      <m:naryPr>
-                        <m:chr m:val="∑"/>
-                        <m:limLoc m:val="undOvr"/>
-                        <m:supHide m:val="on"/>
-                        <m:ctrlPr>
-                          <a:rPr lang="en-US" sz="1000" i="1" dirty="0">
-                            <a:latin typeface="Cambria Math" panose="02040503050406030204" pitchFamily="18" charset="0"/>
-                          </a:rPr>
-                        </m:ctrlPr>
-                      </m:naryPr>
-                      <m:sub>
-                        <m:r>
-                          <a:rPr lang="en-US" sz="1000" i="1" dirty="0">
-                            <a:latin typeface="Cambria Math" panose="02040503050406030204" pitchFamily="18" charset="0"/>
-                          </a:rPr>
-                          <m:t>𝑖</m:t>
-                        </m:r>
-                      </m:sub>
-                      <m:sup/>
-                      <m:e>
-                        <m:sSup>
-                          <m:sSupPr>
-                            <m:ctrlPr>
-                              <a:rPr lang="en-US" sz="1000" i="1" dirty="0">
-                                <a:latin typeface="Cambria Math" panose="02040503050406030204" pitchFamily="18" charset="0"/>
-                              </a:rPr>
-                            </m:ctrlPr>
-                          </m:sSupPr>
-                          <m:e>
-                            <m:d>
-                              <m:dPr>
-                                <m:ctrlPr>
-                                  <a:rPr lang="en-US" sz="1000" i="1" dirty="0">
-                                    <a:latin typeface="Cambria Math" panose="02040503050406030204" pitchFamily="18" charset="0"/>
-                                  </a:rPr>
-                                </m:ctrlPr>
-                              </m:dPr>
-                              <m:e>
-                                <m:sSub>
-                                  <m:sSubPr>
-                                    <m:ctrlPr>
-                                      <a:rPr lang="en-US" sz="1000" i="1" dirty="0">
-                                        <a:latin typeface="Cambria Math" panose="02040503050406030204" pitchFamily="18" charset="0"/>
-                                      </a:rPr>
-                                    </m:ctrlPr>
-                                  </m:sSubPr>
-                                  <m:e>
-                                    <m:acc>
-                                      <m:accPr>
-                                        <m:chr m:val="ˆ"/>
-                                        <m:ctrlPr>
-                                          <a:rPr lang="en-US" sz="1000" i="1" dirty="0">
-                                            <a:latin typeface="Cambria Math" panose="02040503050406030204" pitchFamily="18" charset="0"/>
-                                          </a:rPr>
-                                        </m:ctrlPr>
-                                      </m:accPr>
-                                      <m:e>
-                                        <m:r>
-                                          <a:rPr lang="en-US" sz="1000" i="1" dirty="0">
-                                            <a:latin typeface="Cambria Math" panose="02040503050406030204" pitchFamily="18" charset="0"/>
-                                          </a:rPr>
-                                          <m:t>𝐴</m:t>
-                                        </m:r>
-                                      </m:e>
-                                    </m:acc>
-                                  </m:e>
-                                  <m:sub>
-                                    <m:r>
-                                      <a:rPr lang="en-US" sz="1000" i="1" dirty="0">
-                                        <a:latin typeface="Cambria Math" panose="02040503050406030204" pitchFamily="18" charset="0"/>
-                                      </a:rPr>
-                                      <m:t>𝑖</m:t>
-                                    </m:r>
-                                  </m:sub>
-                                </m:sSub>
-                                <m:r>
-                                  <a:rPr lang="en-US" sz="1000" i="0" dirty="0">
-                                    <a:latin typeface="Cambria Math" panose="02040503050406030204" pitchFamily="18" charset="0"/>
-                                  </a:rPr>
-                                  <m:t>−</m:t>
-                                </m:r>
-                                <m:sSub>
-                                  <m:sSubPr>
-                                    <m:ctrlPr>
-                                      <a:rPr lang="en-US" sz="1000" i="1" dirty="0">
-                                        <a:latin typeface="Cambria Math" panose="02040503050406030204" pitchFamily="18" charset="0"/>
-                                      </a:rPr>
-                                    </m:ctrlPr>
-                                  </m:sSubPr>
-                                  <m:e>
-                                    <m:acc>
-                                      <m:accPr>
-                                        <m:chr m:val="ˆ"/>
-                                        <m:ctrlPr>
-                                          <a:rPr lang="en-US" sz="1000" i="1" dirty="0">
-                                            <a:latin typeface="Cambria Math" panose="02040503050406030204" pitchFamily="18" charset="0"/>
-                                          </a:rPr>
-                                        </m:ctrlPr>
-                                      </m:accPr>
-                                      <m:e>
-                                        <m:r>
-                                          <a:rPr lang="en-US" sz="1000" i="1" dirty="0">
-                                            <a:latin typeface="Cambria Math" panose="02040503050406030204" pitchFamily="18" charset="0"/>
-                                          </a:rPr>
-                                          <m:t>𝜇</m:t>
-                                        </m:r>
-                                      </m:e>
-                                    </m:acc>
-                                  </m:e>
-                                  <m:sub>
-                                    <m:r>
-                                      <a:rPr lang="en-US" sz="1000" i="1" dirty="0">
-                                        <a:latin typeface="Cambria Math" panose="02040503050406030204" pitchFamily="18" charset="0"/>
-                                      </a:rPr>
-                                      <m:t>𝑔</m:t>
-                                    </m:r>
-                                    <m:d>
-                                      <m:dPr>
-                                        <m:ctrlPr>
-                                          <a:rPr lang="en-US" sz="1000" i="1" dirty="0">
-                                            <a:latin typeface="Cambria Math" panose="02040503050406030204" pitchFamily="18" charset="0"/>
-                                          </a:rPr>
-                                        </m:ctrlPr>
-                                      </m:dPr>
-                                      <m:e>
-                                        <m:r>
-                                          <a:rPr lang="en-US" sz="1000" i="1" dirty="0">
-                                            <a:latin typeface="Cambria Math" panose="02040503050406030204" pitchFamily="18" charset="0"/>
-                                          </a:rPr>
-                                          <m:t>𝑖</m:t>
-                                        </m:r>
-                                      </m:e>
-                                    </m:d>
-                                  </m:sub>
-                                </m:sSub>
-                              </m:e>
-                            </m:d>
-                          </m:e>
-                          <m:sup>
-                            <m:r>
-                              <a:rPr lang="en-US" sz="1000" i="0" dirty="0">
-                                <a:latin typeface="Cambria Math" panose="02040503050406030204" pitchFamily="18" charset="0"/>
-                              </a:rPr>
-                              <m:t>2</m:t>
-                            </m:r>
-                          </m:sup>
-                        </m:sSup>
-                      </m:e>
-                    </m:nary>
-                    <m:r>
-                      <a:rPr lang="en-US" sz="1000" i="0" dirty="0">
-                        <a:latin typeface="Cambria Math" panose="02040503050406030204" pitchFamily="18" charset="0"/>
-                      </a:rPr>
-                      <m:t>/</m:t>
-                    </m:r>
-                    <m:nary>
-                      <m:naryPr>
-                        <m:chr m:val="∑"/>
-                        <m:limLoc m:val="undOvr"/>
-                        <m:supHide m:val="on"/>
-                        <m:ctrlPr>
-                          <a:rPr lang="en-US" sz="1000" i="1" dirty="0">
-                            <a:latin typeface="Cambria Math" panose="02040503050406030204" pitchFamily="18" charset="0"/>
-                          </a:rPr>
-                        </m:ctrlPr>
-                      </m:naryPr>
-                      <m:sub>
-                        <m:r>
-                          <a:rPr lang="en-US" sz="1000" i="1" dirty="0">
-                            <a:latin typeface="Cambria Math" panose="02040503050406030204" pitchFamily="18" charset="0"/>
-                          </a:rPr>
-                          <m:t>𝑖</m:t>
-                        </m:r>
-                      </m:sub>
-                      <m:sup/>
-                      <m:e>
-                        <m:sSup>
-                          <m:sSupPr>
-                            <m:ctrlPr>
-                              <a:rPr lang="en-US" sz="1000" i="1" dirty="0">
-                                <a:latin typeface="Cambria Math" panose="02040503050406030204" pitchFamily="18" charset="0"/>
-                              </a:rPr>
-                            </m:ctrlPr>
-                          </m:sSupPr>
-                          <m:e>
-                            <m:d>
-                              <m:dPr>
-                                <m:ctrlPr>
-                                  <a:rPr lang="en-US" sz="1000" i="1" dirty="0">
-                                    <a:latin typeface="Cambria Math" panose="02040503050406030204" pitchFamily="18" charset="0"/>
-                                  </a:rPr>
-                                </m:ctrlPr>
-                              </m:dPr>
-                              <m:e>
-                                <m:sSub>
-                                  <m:sSubPr>
-                                    <m:ctrlPr>
-                                      <a:rPr lang="en-US" sz="1000" i="1" dirty="0">
-                                        <a:latin typeface="Cambria Math" panose="02040503050406030204" pitchFamily="18" charset="0"/>
-                                      </a:rPr>
-                                    </m:ctrlPr>
-                                  </m:sSubPr>
-                                  <m:e>
-                                    <m:acc>
-                                      <m:accPr>
-                                        <m:chr m:val="ˆ"/>
-                                        <m:ctrlPr>
-                                          <a:rPr lang="en-US" sz="1000" i="1" dirty="0">
-                                            <a:latin typeface="Cambria Math" panose="02040503050406030204" pitchFamily="18" charset="0"/>
-                                          </a:rPr>
-                                        </m:ctrlPr>
-                                      </m:accPr>
-                                      <m:e>
-                                        <m:r>
-                                          <a:rPr lang="en-US" sz="1000" i="1" dirty="0">
-                                            <a:latin typeface="Cambria Math" panose="02040503050406030204" pitchFamily="18" charset="0"/>
-                                          </a:rPr>
-                                          <m:t>𝐴</m:t>
-                                        </m:r>
-                                      </m:e>
-                                    </m:acc>
-                                  </m:e>
-                                  <m:sub>
-                                    <m:r>
-                                      <a:rPr lang="en-US" sz="1000" i="1" dirty="0">
-                                        <a:latin typeface="Cambria Math" panose="02040503050406030204" pitchFamily="18" charset="0"/>
-                                      </a:rPr>
-                                      <m:t>𝑖</m:t>
-                                    </m:r>
-                                  </m:sub>
-                                </m:sSub>
-                                <m:r>
-                                  <a:rPr lang="en-US" sz="1000" i="0" dirty="0">
-                                    <a:latin typeface="Cambria Math" panose="02040503050406030204" pitchFamily="18" charset="0"/>
-                                  </a:rPr>
-                                  <m:t>−</m:t>
-                                </m:r>
-                                <m:acc>
-                                  <m:accPr>
-                                    <m:chr m:val="̅"/>
-                                    <m:ctrlPr>
-                                      <a:rPr lang="en-US" sz="1000" i="1" dirty="0">
-                                        <a:latin typeface="Cambria Math" panose="02040503050406030204" pitchFamily="18" charset="0"/>
-                                      </a:rPr>
-                                    </m:ctrlPr>
-                                  </m:accPr>
-                                  <m:e>
-                                    <m:r>
-                                      <a:rPr lang="en-US" sz="1000" i="1" dirty="0">
-                                        <a:latin typeface="Cambria Math" panose="02040503050406030204" pitchFamily="18" charset="0"/>
-                                      </a:rPr>
-                                      <m:t>𝐴</m:t>
-                                    </m:r>
-                                  </m:e>
-                                </m:acc>
-                              </m:e>
-                            </m:d>
-                          </m:e>
-                          <m:sup>
-                            <m:r>
-                              <a:rPr lang="en-US" sz="1000" i="0" dirty="0">
-                                <a:latin typeface="Cambria Math" panose="02040503050406030204" pitchFamily="18" charset="0"/>
-                              </a:rPr>
-                              <m:t>2</m:t>
-                            </m:r>
-                          </m:sup>
-                        </m:sSup>
-                      </m:e>
-                    </m:nary>
-                  </m:oMath>
-                </a14:m>
-                <a:r>
-                  <a:rPr lang="en-US" sz="1000" dirty="0">
-                    <a:latin typeface="Calibri"/>
-                  </a:rPr>
-                  <a:t> — realized sorting on a fixed partition.</a:t>
-                </a:r>
-              </a:p>
-              <a:p>
-                <a:pPr>
-                  <a:lnSpc>
-                    <a:spcPct val="150000"/>
-                  </a:lnSpc>
-                  <a:buChar char="•"/>
-                </a:pPr>
-                <a:r>
-                  <a:rPr lang="en-US" sz="1000" dirty="0">
-                    <a:latin typeface="Calibri"/>
-                  </a:rPr>
-                  <a:t>  2013</a:t>
-                </a:r>
-                <a14:m>
-                  <m:oMath xmlns:m="http://schemas.openxmlformats.org/officeDocument/2006/math">
-                    <m:r>
-                      <a:rPr lang="en-US" sz="1000" dirty="0" smtClean="0">
-                        <a:latin typeface="Cambria Math" panose="02040503050406030204" pitchFamily="18" charset="0"/>
-                      </a:rPr>
-                      <m:t>→</m:t>
-                    </m:r>
-                  </m:oMath>
-                </a14:m>
-                <a:r>
-                  <a:rPr lang="en-US" sz="1000" dirty="0">
-                    <a:latin typeface="Calibri"/>
-                  </a:rPr>
-                  <a:t>$2014 per-season </a:t>
-                </a:r>
-                <a14:m>
-                  <m:oMath xmlns:m="http://schemas.openxmlformats.org/officeDocument/2006/math">
-                    <m:sSup>
-                      <m:sSupPr>
-                        <m:ctrlPr>
-                          <a:rPr lang="en-US" sz="1000" i="1" dirty="0">
-                            <a:latin typeface="Cambria Math" panose="02040503050406030204" pitchFamily="18" charset="0"/>
-                          </a:rPr>
-                        </m:ctrlPr>
-                      </m:sSupPr>
-                      <m:e>
-                        <m:r>
-                          <a:rPr lang="en-US" sz="1000" i="1" dirty="0">
-                            <a:latin typeface="Cambria Math" panose="02040503050406030204" pitchFamily="18" charset="0"/>
-                          </a:rPr>
-                          <m:t>𝜌</m:t>
-                        </m:r>
-                      </m:e>
-                      <m:sup>
-                        <m:r>
-                          <a:rPr lang="en-US" sz="1000" i="0" dirty="0">
-                            <a:latin typeface="Cambria Math" panose="02040503050406030204" pitchFamily="18" charset="0"/>
-                          </a:rPr>
-                          <m:t>∗</m:t>
-                        </m:r>
-                      </m:sup>
-                    </m:sSup>
-                  </m:oMath>
-                </a14:m>
-                <a:r>
-                  <a:rPr lang="en-US" sz="1000" dirty="0">
-                    <a:latin typeface="Calibri"/>
-                  </a:rPr>
-                  <a:t>: </a:t>
-                </a:r>
-                <a14:m>
-                  <m:oMath xmlns:m="http://schemas.openxmlformats.org/officeDocument/2006/math">
-                    <m:r>
-                      <a:rPr lang="en-US" sz="1000" dirty="0" smtClean="0">
-                        <a:latin typeface="Cambria Math" panose="02040503050406030204" pitchFamily="18" charset="0"/>
-                      </a:rPr>
-                      <m:t>0.103</m:t>
-                    </m:r>
-                    <m:r>
-                      <a:rPr lang="en-US" sz="1000" i="0" dirty="0">
-                        <a:latin typeface="Cambria Math" panose="02040503050406030204" pitchFamily="18" charset="0"/>
-                      </a:rPr>
-                      <m:t>→0.569</m:t>
-                    </m:r>
-                  </m:oMath>
-                </a14:m>
-                <a:r>
-                  <a:rPr lang="en-US" sz="1000" dirty="0">
-                    <a:latin typeface="Calibri"/>
-                  </a:rPr>
-                  <a:t> — coincides with raw ESPN player-season count jump; not used for locked calibration.</a:t>
-                </a:r>
-              </a:p>
-              <a:p>
-                <a:pPr>
-                  <a:lnSpc>
-                    <a:spcPct val="150000"/>
-                  </a:lnSpc>
-                  <a:buChar char="•"/>
-                </a:pPr>
-                <a:r>
-                  <a:rPr lang="en-US" sz="1000" dirty="0">
-                    <a:latin typeface="Calibri"/>
-                  </a:rPr>
-                  <a:t>  Pair with PD22 ESPN coverage backup slide — 2013</a:t>
-                </a:r>
-                <a14:m>
-                  <m:oMath xmlns:m="http://schemas.openxmlformats.org/officeDocument/2006/math">
-                    <m:r>
-                      <a:rPr lang="en-US" sz="1000" dirty="0" smtClean="0">
-                        <a:latin typeface="Cambria Math" panose="02040503050406030204" pitchFamily="18" charset="0"/>
-                      </a:rPr>
-                      <m:t>→</m:t>
-                    </m:r>
-                  </m:oMath>
-                </a14:m>
-                <a:r>
-                  <a:rPr lang="en-US" sz="1000" dirty="0">
-                    <a:latin typeface="Calibri"/>
-                  </a:rPr>
-                  <a:t>2014 raw player-season jump explains this timeseries, not doubled games.</a:t>
-                </a:r>
-                <a:endParaRPr sz="1000" b="0" i="0" baseline="0" dirty="0">
-                  <a:latin typeface="Calibri"/>
-                </a:endParaRPr>
-              </a:p>
-            </p:txBody>
-          </p:sp>
-        </mc:Choice>
-        <mc:Fallback>
-          <p:sp>
-            <p:nvSpPr>
-              <p:cNvPr id="5" name="TextBox 4"/>
-              <p:cNvSpPr txBox="1">
-                <a:spLocks noRot="1" noChangeAspect="1" noMove="1" noResize="1" noEditPoints="1" noAdjustHandles="1" noChangeArrowheads="1" noChangeShapeType="1" noTextEdit="1"/>
-              </p:cNvSpPr>
-              <p:nvPr/>
-            </p:nvSpPr>
-            <p:spPr>
-              <a:xfrm>
-                <a:off x="235366" y="1149319"/>
-                <a:ext cx="3702454" cy="3409331"/>
-              </a:xfrm>
-              <a:prstGeom prst="rect">
-                <a:avLst/>
-              </a:prstGeom>
-              <a:blipFill>
-                <a:blip r:embed="rId5"/>
-                <a:stretch>
-                  <a:fillRect/>
-                </a:stretch>
-              </a:blipFill>
-            </p:spPr>
-            <p:txBody>
-              <a:bodyPr/>
-              <a:lstStyle/>
-              <a:p>
-                <a:r>
-                  <a:rPr lang="en-US">
-                    <a:noFill/>
-                  </a:rPr>
-                  <a:t> </a:t>
-                </a:r>
-              </a:p>
-            </p:txBody>
-          </p:sp>
-        </mc:Fallback>
-      </mc:AlternateContent>
-      <mc:AlternateContent xmlns:mc="http://schemas.openxmlformats.org/markup-compatibility/2006">
-        <mc:Choice xmlns:a14="http://schemas.microsoft.com/office/drawing/2010/main" Requires="a14">
-          <p:sp>
-            <p:nvSpPr>
-              <p:cNvPr id="6" name="TextBox 5">
-                <a:extLst>
-                  <a:ext uri="{FF2B5EF4-FFF2-40B4-BE49-F238E27FC236}">
-                    <a16:creationId xmlns:a16="http://schemas.microsoft.com/office/drawing/2014/main" id="{50C222D3-03B9-E83A-EA0C-EC283EC4576D}"/>
-                  </a:ext>
-                </a:extLst>
-              </p:cNvPr>
-              <p:cNvSpPr txBox="1"/>
-              <p:nvPr/>
-            </p:nvSpPr>
-            <p:spPr>
-              <a:xfrm>
-                <a:off x="384048" y="6089904"/>
-                <a:ext cx="11423599" cy="261610"/>
-              </a:xfrm>
-              <a:prstGeom prst="rect">
-                <a:avLst/>
-              </a:prstGeom>
-              <a:noFill/>
-            </p:spPr>
-            <p:txBody>
-              <a:bodyPr wrap="square">
-                <a:spAutoFit/>
-              </a:bodyPr>
-              <a:lstStyle/>
-              <a:p>
-                <a:pPr algn="l"/>
-                <a:r>
-                  <a:rPr sz="1100" b="1" i="0" baseline="0" dirty="0">
-                    <a:latin typeface="Calibri"/>
-                  </a:rPr>
-                  <a:t>Claim (PD21 contrast): 2013</a:t>
-                </a:r>
-                <a14:m>
-                  <m:oMath xmlns:m="http://schemas.openxmlformats.org/officeDocument/2006/math">
-                    <m:r>
-                      <a:rPr lang="en-US" sz="1100" b="1" i="0" baseline="0" dirty="0" smtClean="0">
-                        <a:latin typeface="Cambria Math" panose="02040503050406030204" pitchFamily="18" charset="0"/>
-                      </a:rPr>
-                      <m:t>→</m:t>
-                    </m:r>
-                  </m:oMath>
-                </a14:m>
-                <a:r>
-                  <a:rPr sz="1100" b="1" i="0" baseline="0" dirty="0">
-                    <a:latin typeface="Calibri"/>
-                  </a:rPr>
-                  <a:t>2014 jump in per-season </a:t>
-                </a:r>
-                <a14:m>
-                  <m:oMath xmlns:m="http://schemas.openxmlformats.org/officeDocument/2006/math">
-                    <m:sSup>
-                      <m:sSupPr>
-                        <m:ctrlPr>
-                          <a:rPr lang="en-US" sz="1100" b="1" i="0" baseline="0" dirty="0">
-                            <a:latin typeface="Cambria Math" panose="02040503050406030204" pitchFamily="18" charset="0"/>
-                          </a:rPr>
-                        </m:ctrlPr>
-                      </m:sSupPr>
-                      <m:e>
-                        <m:r>
-                          <a:rPr lang="en-US" sz="1100" b="1" i="0" baseline="0" dirty="0">
-                            <a:latin typeface="Cambria Math" panose="02040503050406030204" pitchFamily="18" charset="0"/>
-                          </a:rPr>
-                          <m:t>𝜌</m:t>
-                        </m:r>
-                      </m:e>
-                      <m:sup>
-                        <m:r>
-                          <a:rPr lang="en-US" sz="1100" b="1" i="0" baseline="0" dirty="0">
-                            <a:latin typeface="Cambria Math" panose="02040503050406030204" pitchFamily="18" charset="0"/>
-                          </a:rPr>
-                          <m:t>∗</m:t>
-                        </m:r>
-                      </m:sup>
-                    </m:sSup>
-                  </m:oMath>
-                </a14:m>
-                <a:r>
-                  <a:rPr sz="1100" b="1" i="0" baseline="0" dirty="0">
-                    <a:latin typeface="Calibri"/>
-                  </a:rPr>
-                  <a:t> on </a:t>
-                </a:r>
-                <a14:m>
-                  <m:oMath xmlns:m="http://schemas.openxmlformats.org/officeDocument/2006/math">
-                    <m:r>
-                      <a:rPr lang="en-US" sz="1100" b="1" i="0" baseline="0" dirty="0" smtClean="0">
-                        <a:latin typeface="Cambria Math" panose="02040503050406030204" pitchFamily="18" charset="0"/>
-                      </a:rPr>
-                      <m:t>𝑝𝑝𝑚</m:t>
-                    </m:r>
-                    <m:r>
-                      <a:rPr lang="en-US" sz="1100" b="1" i="0" baseline="0" dirty="0" smtClean="0">
-                        <a:latin typeface="Cambria Math" panose="02040503050406030204" pitchFamily="18" charset="0"/>
-                      </a:rPr>
-                      <m:t>0</m:t>
-                    </m:r>
-                    <m:r>
-                      <a:rPr lang="en-US" sz="1100" b="1" i="0" baseline="0" dirty="0" smtClean="0">
-                        <a:latin typeface="Cambria Math" panose="02040503050406030204" pitchFamily="18" charset="0"/>
-                      </a:rPr>
-                      <m:t>𝑙𝑡</m:t>
-                    </m:r>
-                    <m:r>
-                      <a:rPr lang="en-US" sz="1100" b="1" i="0" baseline="0" dirty="0" smtClean="0">
-                        <a:latin typeface="Cambria Math" panose="02040503050406030204" pitchFamily="18" charset="0"/>
-                      </a:rPr>
-                      <m:t>20</m:t>
-                    </m:r>
-                  </m:oMath>
-                </a14:m>
-                <a:r>
-                  <a:rPr sz="1100" b="1" i="0" baseline="0" dirty="0">
-                    <a:latin typeface="Calibri"/>
-                  </a:rPr>
-                  <a:t> is ESPN roster-depth artifact — hero min-</a:t>
-                </a:r>
-                <a14:m>
-                  <m:oMath xmlns:m="http://schemas.openxmlformats.org/officeDocument/2006/math">
-                    <m:r>
-                      <a:rPr lang="en-US" sz="1100" b="1" i="0" baseline="0" dirty="0" smtClean="0">
-                        <a:latin typeface="Cambria Math" panose="02040503050406030204" pitchFamily="18" charset="0"/>
-                      </a:rPr>
-                      <m:t>20</m:t>
-                    </m:r>
-                  </m:oMath>
-                </a14:m>
-                <a:r>
-                  <a:rPr sz="1100" b="1" i="0" baseline="0" dirty="0">
-                    <a:latin typeface="Calibri"/>
-                  </a:rPr>
-                  <a:t> panel gives flat </a:t>
-                </a:r>
-                <a14:m>
-                  <m:oMath xmlns:m="http://schemas.openxmlformats.org/officeDocument/2006/math">
-                    <m:sSup>
-                      <m:sSupPr>
-                        <m:ctrlPr>
-                          <a:rPr lang="en-US" sz="1100" b="1" i="0" baseline="0" dirty="0">
-                            <a:latin typeface="Cambria Math" panose="02040503050406030204" pitchFamily="18" charset="0"/>
-                          </a:rPr>
-                        </m:ctrlPr>
-                      </m:sSupPr>
-                      <m:e>
-                        <m:r>
-                          <a:rPr lang="en-US" sz="1100" b="1" i="0" baseline="0" dirty="0">
-                            <a:latin typeface="Cambria Math" panose="02040503050406030204" pitchFamily="18" charset="0"/>
-                          </a:rPr>
-                          <m:t>𝜌</m:t>
-                        </m:r>
-                      </m:e>
-                      <m:sup>
-                        <m:r>
-                          <a:rPr lang="en-US" sz="1100" b="1" i="0" baseline="0" dirty="0">
-                            <a:latin typeface="Cambria Math" panose="02040503050406030204" pitchFamily="18" charset="0"/>
-                          </a:rPr>
-                          <m:t>∗</m:t>
-                        </m:r>
-                      </m:sup>
-                    </m:sSup>
-                  </m:oMath>
-                </a14:m>
-                <a:r>
-                  <a:rPr sz="1100" b="1" i="0" baseline="0" dirty="0">
-                    <a:latin typeface="Calibri"/>
-                  </a:rPr>
-                  <a:t>; see PD22 ESPN coverage backup.</a:t>
-                </a:r>
-              </a:p>
-            </p:txBody>
-          </p:sp>
-        </mc:Choice>
-        <mc:Fallback>
-          <p:sp>
-            <p:nvSpPr>
-              <p:cNvPr id="6" name="TextBox 5">
-                <a:extLst>
-                  <a:ext uri="{FF2B5EF4-FFF2-40B4-BE49-F238E27FC236}">
-                    <a16:creationId xmlns:a16="http://schemas.microsoft.com/office/drawing/2014/main" id="{50C222D3-03B9-E83A-EA0C-EC283EC4576D}"/>
-                  </a:ext>
-                </a:extLst>
-              </p:cNvPr>
-              <p:cNvSpPr txBox="1">
-                <a:spLocks noRot="1" noChangeAspect="1" noMove="1" noResize="1" noEditPoints="1" noAdjustHandles="1" noChangeArrowheads="1" noChangeShapeType="1" noTextEdit="1"/>
-              </p:cNvSpPr>
-              <p:nvPr/>
-            </p:nvSpPr>
-            <p:spPr>
-              <a:xfrm>
-                <a:off x="384048" y="6089904"/>
-                <a:ext cx="11423599" cy="261610"/>
-              </a:xfrm>
-              <a:prstGeom prst="rect">
-                <a:avLst/>
-              </a:prstGeom>
-              <a:blipFill>
-                <a:blip r:embed="rId6"/>
-                <a:stretch>
-                  <a:fillRect b="-13636"/>
-                </a:stretch>
-              </a:blipFill>
-            </p:spPr>
-            <p:txBody>
-              <a:bodyPr/>
-              <a:lstStyle/>
-              <a:p>
-                <a:r>
-                  <a:rPr lang="en-US">
-                    <a:noFill/>
-                  </a:rPr>
-                  <a:t> </a:t>
-                </a:r>
-              </a:p>
-            </p:txBody>
-          </p:sp>
-        </mc:Fallback>
-      </mc:AlternateContent>
+      <p:sp>
+        <p:nvSpPr>
+          <p:cNvPr id="5" name="TextBox 4"/>
+          <p:cNvSpPr txBox="1"/>
+          <p:nvPr/>
+        </p:nvSpPr>
+        <p:spPr>
+          <a:xfrm>
+            <a:off x="384048" y="5074920"/>
+            <a:ext cx="11423599" cy="960120"/>
+          </a:xfrm>
+          <a:prstGeom prst="rect">
+            <a:avLst/>
+          </a:prstGeom>
+          <a:noFill/>
+        </p:spPr>
+        <p:txBody>
+          <a:bodyPr wrap="square">
+            <a:spAutoFit/>
+          </a:bodyPr>
+          <a:lstStyle/>
+          <a:p>
+            <a:pPr>
+              <a:buChar char="•"/>
+              <a:lnSpc>
+                <a:spcPct val="150000"/>
+              </a:lnSpc>
+              <a:spcBef>
+                <a:spcPts val="0"/>
+              </a:spcBef>
+              <a:spcAft>
+                <a:spcPts val="0"/>
+              </a:spcAft>
+            </a:pPr>
+            <a:r>
+              <a:rPr sz="1000" b="0" i="0" baseline="0">
+                <a:latin typeface="Calibri"/>
+              </a:rPr>
+              <a:t>  PD21 contrast (Aug 2026): ppm0lt20 panel — illustrative only; do not use for locked longitudinal $\rho$ calibration.</a:t>
+            </a:r>
+          </a:p>
+          <a:p>
+            <a:pPr>
+              <a:buChar char="•"/>
+              <a:lnSpc>
+                <a:spcPct val="150000"/>
+              </a:lnSpc>
+              <a:spcBef>
+                <a:spcPts val="0"/>
+              </a:spcBef>
+              <a:spcAft>
+                <a:spcPts val="0"/>
+              </a:spcAft>
+            </a:pPr>
+            <a:r>
+              <a:rPr sz="1000" b="0" i="0" baseline="0">
+                <a:latin typeface="Calibri"/>
+              </a:rPr>
+              <a:t>  Panel: 2011–2021 MBB · all roster rows kept · raw PPM$=0$ if minutes$&lt;20$ · no roster caps — contrast / legacy estimand only.</a:t>
+            </a:r>
+          </a:p>
+          <a:p>
+            <a:pPr>
+              <a:buChar char="•"/>
+              <a:lnSpc>
+                <a:spcPct val="150000"/>
+              </a:lnSpc>
+              <a:spcBef>
+                <a:spcPts val="0"/>
+              </a:spcBef>
+              <a:spcAft>
+                <a:spcPts val="0"/>
+              </a:spcAft>
+            </a:pPr>
+            <a:r>
+              <a:rPr sz="1000" b="0" i="0" baseline="0">
+                <a:latin typeface="Calibri"/>
+              </a:rPr>
+              <a:t>  Red (left): per-season calibrated $\rho^*$; dotted red = mean $\rho^*$ ($\approx 0.477$). Open circles = hit $\rho_{\max}$ cap.</a:t>
+            </a:r>
+          </a:p>
+          <a:p>
+            <a:pPr>
+              <a:buChar char="•"/>
+              <a:lnSpc>
+                <a:spcPct val="150000"/>
+              </a:lnSpc>
+              <a:spcBef>
+                <a:spcPts val="0"/>
+              </a:spcBef>
+              <a:spcAft>
+                <a:spcPts val="0"/>
+              </a:spcAft>
+            </a:pPr>
+            <a:r>
+              <a:rPr sz="1000" b="0" i="0" baseline="0">
+                <a:latin typeface="Calibri"/>
+              </a:rPr>
+              <a:t>  Blue (right): empirical $H_{\mathrm{sort}}$ by season; dotted blue = longitudinal mean $H_{\mathrm{sort}}^{\mathrm{emp}}$ ($\approx 0.171$).</a:t>
+            </a:r>
+          </a:p>
+          <a:p>
+            <a:pPr>
+              <a:buChar char="•"/>
+              <a:lnSpc>
+                <a:spcPct val="150000"/>
+              </a:lnSpc>
+              <a:spcBef>
+                <a:spcPts val="0"/>
+              </a:spcBef>
+              <a:spcAft>
+                <a:spcPts val="0"/>
+              </a:spcAft>
+            </a:pPr>
+            <a:r>
+              <a:rPr sz="1000" b="0" i="0" baseline="0">
+                <a:latin typeface="Calibri"/>
+              </a:rPr>
+              <a:t>  H_{sort} = 1 - \sum_i(\hat{A}_i - \hat{\mu}_{g(i)})^2 / \sum_i(\hat{A}_i - \bar{A})^2 — realized sorting on a fixed partition.</a:t>
+            </a:r>
+          </a:p>
+          <a:p>
+            <a:pPr>
+              <a:buChar char="•"/>
+              <a:lnSpc>
+                <a:spcPct val="150000"/>
+              </a:lnSpc>
+              <a:spcBef>
+                <a:spcPts val="0"/>
+              </a:spcBef>
+              <a:spcAft>
+                <a:spcPts val="0"/>
+              </a:spcAft>
+            </a:pPr>
+            <a:r>
+              <a:rPr sz="1000" b="0" i="0" baseline="0">
+                <a:latin typeface="Calibri"/>
+              </a:rPr>
+              <a:t>  2013$\rightarrow$2014 per-season $\rho^*$: $0.103\rightarrow0.569$ — coincides with raw ESPN player-season count jump; not used for locked calibration.</a:t>
+            </a:r>
+          </a:p>
+          <a:p>
+            <a:pPr>
+              <a:buChar char="•"/>
+              <a:lnSpc>
+                <a:spcPct val="150000"/>
+              </a:lnSpc>
+              <a:spcBef>
+                <a:spcPts val="0"/>
+              </a:spcBef>
+              <a:spcAft>
+                <a:spcPts val="0"/>
+              </a:spcAft>
+            </a:pPr>
+            <a:r>
+              <a:rPr sz="1000" b="0" i="0" baseline="0">
+                <a:latin typeface="Calibri"/>
+              </a:rPr>
+              <a:t>  Pair with PD22 ESPN coverage (HAND20 slide 9) — 2013$\rightarrow$2014 raw player-season jump explains this timeseries, not doubled games.</a:t>
+            </a:r>
+          </a:p>
+        </p:txBody>
+      </p:sp>
+      <p:sp>
+        <p:nvSpPr>
+          <p:cNvPr id="6" name="TextBox 5"/>
+          <p:cNvSpPr txBox="1"/>
+          <p:nvPr/>
+        </p:nvSpPr>
+        <p:spPr>
+          <a:xfrm>
+            <a:off x="384048" y="6089904"/>
+            <a:ext cx="11423599" cy="384048"/>
+          </a:xfrm>
+          <a:prstGeom prst="rect">
+            <a:avLst/>
+          </a:prstGeom>
+          <a:noFill/>
+        </p:spPr>
+        <p:txBody>
+          <a:bodyPr wrap="square">
+            <a:spAutoFit/>
+          </a:bodyPr>
+          <a:lstStyle/>
+          <a:p>
+            <a:pPr algn="l"/>
+            <a:r>
+              <a:rPr sz="1100" b="1" i="0" baseline="0">
+                <a:latin typeface="Calibri"/>
+              </a:rPr>
+              <a:t>Claim (PD21 contrast): 2013$\rightarrow$2014 jump in per-season $\rho^*$ on ppm0lt20 is ESPN roster-depth artifact — hero min-20 panel gives flat $\rho^*$; see PD22 ESPN coverage (HAND20 slide 9).</a:t>
+            </a:r>
+          </a:p>
+        </p:txBody>
+      </p:sp>
     </p:spTree>
   </p:cSld>
   <p:clrMapOvr>

--- a/3-Master_Plan/re_entry/HEROs_and_PASSes/slides/auto/CHAR_PD21_rho_hsort_timeseries_ppm0lt20_AUTO.pptx
+++ b/3-Master_Plan/re_entry/HEROs_and_PASSes/slides/auto/CHAR_PD21_rho_hsort_timeseries_ppm0lt20_AUTO.pptx
@@ -3166,8 +3166,8 @@
         </p:blipFill>
         <p:spPr>
           <a:xfrm>
-            <a:off x="2417574" y="1051560"/>
-            <a:ext cx="7356546" cy="3950208"/>
+            <a:off x="2417083" y="1051560"/>
+            <a:ext cx="7357529" cy="3950208"/>
           </a:xfrm>
           <a:prstGeom prst="rect">
             <a:avLst/>
@@ -3252,7 +3252,7 @@
               <a:rPr sz="1000" b="0" i="0" baseline="0">
                 <a:latin typeface="Calibri"/>
               </a:rPr>
-              <a:t>  Red (left): per-season calibrated $\rho^*$; dotted red = mean $\rho^*$ ($\approx 0.477$). Open circles = hit $\rho_{\max}$ cap.</a:t>
+              <a:t>  Red (left): per-season calibrated $\rho^*$; dotted red = mean $\rho^*$ ($\approx 0.0474$). Open circles = hit $\rho_{\max}$ cap.</a:t>
             </a:r>
           </a:p>
           <a:p>
@@ -3272,7 +3272,7 @@
               <a:rPr sz="1000" b="0" i="0" baseline="0">
                 <a:latin typeface="Calibri"/>
               </a:rPr>
-              <a:t>  Blue (right): empirical $H_{\mathrm{sort}}$ by season; dotted blue = longitudinal mean $H_{\mathrm{sort}}^{\mathrm{emp}}$ ($\approx 0.171$).</a:t>
+              <a:t>  Blue (right): empirical $H_{\mathrm{sort}}$ by season; dotted blue = longitudinal mean $H_{\mathrm{sort}}^{\mathrm{emp}}$ ($\approx 0.065$).</a:t>
             </a:r>
           </a:p>
           <a:p>
@@ -3312,7 +3312,7 @@
               <a:rPr sz="1000" b="0" i="0" baseline="0">
                 <a:latin typeface="Calibri"/>
               </a:rPr>
-              <a:t>  2013$\rightarrow$2014 per-season $\rho^*$: $0.103\rightarrow0.569$ — coincides with raw ESPN player-season count jump; not used for locked calibration.</a:t>
+              <a:t>  2014$\rightarrow$2015 per-season $\rho^*$: $0.000\rightarrow0.184$ — mid-decade spike co-moves with empirical $H_{\mathrm{sort}}$; not used for locked calibration.</a:t>
             </a:r>
           </a:p>
           <a:p>
@@ -3332,7 +3332,7 @@
               <a:rPr sz="1000" b="0" i="0" baseline="0">
                 <a:latin typeface="Calibri"/>
               </a:rPr>
-              <a:t>  Pair with PD22 ESPN coverage (HAND20 slide 9) — 2013$\rightarrow$2014 raw player-season jump explains this timeseries, not doubled games.</a:t>
+              <a:t>  Pair with PD22 ESPN coverage (HAND20 slide 9) — roster-depth context for ppm0lt20; mid-decade $\rho^*$ spike is not the locked calibration estimand.</a:t>
             </a:r>
           </a:p>
         </p:txBody>
@@ -3364,7 +3364,7 @@
               <a:rPr sz="1100" b="1" i="0" baseline="0">
                 <a:latin typeface="Calibri"/>
               </a:rPr>
-              <a:t>Claim (PD21 contrast): 2013$\rightarrow$2014 jump in per-season $\rho^*$ on ppm0lt20 is ESPN roster-depth artifact — hero min-20 panel gives flat $\rho^*$; see PD22 ESPN coverage (HAND20 slide 9).</a:t>
+              <a:t>Claim (PD21 contrast): ppm0lt20 mid-decade per-season $\rho^*$ spike (2014$\rightarrow$2015) co-moves with empirical $H_{\mathrm{sort}}$ — hero min-20 panel gives flat $\rho^*$; see PD22 ESPN coverage (HAND20 slide 9).</a:t>
             </a:r>
           </a:p>
         </p:txBody>
